--- a/PI-P.pptx
+++ b/PI-P.pptx
@@ -7157,14 +7157,13 @@
               </a:ext>
             </a:extLst>
           </a:blip>
-          <a:stretch>
-            <a:fillRect/>
-          </a:stretch>
+          <a:srcRect/>
+          <a:stretch/>
         </p:blipFill>
         <p:spPr>
           <a:xfrm>
             <a:off x="20104083" y="7795926"/>
-            <a:ext cx="8481677" cy="5621134"/>
+            <a:ext cx="8481676" cy="5621134"/>
           </a:xfrm>
           <a:prstGeom prst="rect">
             <a:avLst/>

--- a/PI-P.pptx
+++ b/PI-P.pptx
@@ -2,7 +2,7 @@
 <file path=ppt/presentation.xml><?xml version="1.0" encoding="utf-8"?>
 <p:presentation xmlns:a="http://schemas.openxmlformats.org/drawingml/2006/main" xmlns:r="http://schemas.openxmlformats.org/officeDocument/2006/relationships" xmlns:p="http://schemas.openxmlformats.org/presentationml/2006/main" saveSubsetFonts="1">
   <p:sldMasterIdLst>
-    <p:sldMasterId id="2147483737" r:id="rId1"/>
+    <p:sldMasterId id="2147483763" r:id="rId1"/>
   </p:sldMasterIdLst>
   <p:sldIdLst>
     <p:sldId id="256" r:id="rId2"/>
@@ -474,7 +474,7 @@
 </file>
 
 <file path=ppt/slideLayouts/slideLayout1.xml><?xml version="1.0" encoding="utf-8"?>
-<p:sldLayout xmlns:a="http://schemas.openxmlformats.org/drawingml/2006/main" xmlns:r="http://schemas.openxmlformats.org/officeDocument/2006/relationships" xmlns:p="http://schemas.openxmlformats.org/presentationml/2006/main" showMasterSp="0" type="title" preserve="1">
+<p:sldLayout xmlns:a="http://schemas.openxmlformats.org/drawingml/2006/main" xmlns:r="http://schemas.openxmlformats.org/officeDocument/2006/relationships" xmlns:p="http://schemas.openxmlformats.org/presentationml/2006/main" type="title" preserve="1">
   <p:cSld name="Title Slide">
     <p:spTree>
       <p:nvGrpSpPr>
@@ -492,84 +492,6 @@
       </p:grpSpPr>
       <p:sp>
         <p:nvSpPr>
-          <p:cNvPr id="7" name="Rectangle 6"/>
-          <p:cNvSpPr/>
-          <p:nvPr/>
-        </p:nvSpPr>
-        <p:spPr>
-          <a:xfrm>
-            <a:off x="4" y="4754918"/>
-            <a:ext cx="22694544" cy="33284414"/>
-          </a:xfrm>
-          <a:prstGeom prst="rect">
-            <a:avLst/>
-          </a:prstGeom>
-          <a:solidFill>
-            <a:schemeClr val="accent1"/>
-          </a:solidFill>
-          <a:ln>
-            <a:noFill/>
-          </a:ln>
-        </p:spPr>
-        <p:style>
-          <a:lnRef idx="2">
-            <a:schemeClr val="accent1">
-              <a:shade val="50000"/>
-            </a:schemeClr>
-          </a:lnRef>
-          <a:fillRef idx="1">
-            <a:schemeClr val="accent1"/>
-          </a:fillRef>
-          <a:effectRef idx="0">
-            <a:schemeClr val="accent1"/>
-          </a:effectRef>
-          <a:fontRef idx="minor">
-            <a:schemeClr val="lt1"/>
-          </a:fontRef>
-        </p:style>
-      </p:sp>
-      <p:sp>
-        <p:nvSpPr>
-          <p:cNvPr id="8" name="Rectangle 7"/>
-          <p:cNvSpPr/>
-          <p:nvPr/>
-        </p:nvSpPr>
-        <p:spPr>
-          <a:xfrm>
-            <a:off x="23013912" y="4754918"/>
-            <a:ext cx="7262256" cy="33284414"/>
-          </a:xfrm>
-          <a:prstGeom prst="rect">
-            <a:avLst/>
-          </a:prstGeom>
-          <a:solidFill>
-            <a:srgbClr val="C3C3C3">
-              <a:alpha val="49804"/>
-            </a:srgbClr>
-          </a:solidFill>
-          <a:ln>
-            <a:noFill/>
-          </a:ln>
-        </p:spPr>
-        <p:style>
-          <a:lnRef idx="2">
-            <a:schemeClr val="accent1">
-              <a:shade val="50000"/>
-            </a:schemeClr>
-          </a:lnRef>
-          <a:fillRef idx="1">
-            <a:schemeClr val="accent1"/>
-          </a:fillRef>
-          <a:effectRef idx="0">
-            <a:schemeClr val="accent1"/>
-          </a:effectRef>
-          <a:fontRef idx="minor">
-            <a:schemeClr val="lt1"/>
-          </a:fontRef>
-        </p:style>
-      </p:sp>
-      <p:sp>
-        <p:nvSpPr>
           <p:cNvPr id="2" name="Title 1"/>
           <p:cNvSpPr>
             <a:spLocks noGrp="1"/>
@@ -580,21 +502,15 @@
         </p:nvSpPr>
         <p:spPr>
           <a:xfrm>
-            <a:off x="2655953" y="8102376"/>
-            <a:ext cx="18160365" cy="20312998"/>
+            <a:off x="2270046" y="7003597"/>
+            <a:ext cx="25727184" cy="14898735"/>
           </a:xfrm>
         </p:spPr>
         <p:txBody>
-          <a:bodyPr anchor="b">
-            <a:normAutofit/>
-          </a:bodyPr>
+          <a:bodyPr anchor="b"/>
           <a:lstStyle>
-            <a:lvl1pPr algn="l">
-              <a:defRPr sz="17875" spc="-331" baseline="0">
-                <a:solidFill>
-                  <a:srgbClr val="FFFFFF"/>
-                </a:solidFill>
-              </a:defRPr>
+            <a:lvl1pPr algn="ctr">
+              <a:defRPr sz="19861"/>
             </a:lvl1pPr>
           </a:lstStyle>
           <a:p>
@@ -618,25 +534,16 @@
         </p:nvSpPr>
         <p:spPr>
           <a:xfrm>
-            <a:off x="2730844" y="29142552"/>
-            <a:ext cx="18160365" cy="5705898"/>
+            <a:off x="3783410" y="22476884"/>
+            <a:ext cx="22700456" cy="10332032"/>
           </a:xfrm>
         </p:spPr>
         <p:txBody>
-          <a:bodyPr anchor="t">
-            <a:normAutofit/>
-          </a:bodyPr>
+          <a:bodyPr/>
           <a:lstStyle>
-            <a:lvl1pPr marL="0" indent="0" algn="l">
+            <a:lvl1pPr marL="0" indent="0" algn="ctr">
               <a:buNone/>
-              <a:defRPr sz="6620" cap="none" spc="0" baseline="0">
-                <a:solidFill>
-                  <a:schemeClr val="accent1">
-                    <a:lumMod val="20000"/>
-                    <a:lumOff val="80000"/>
-                  </a:schemeClr>
-                </a:solidFill>
-              </a:defRPr>
+              <a:defRPr sz="7944"/>
             </a:lvl1pPr>
             <a:lvl2pPr marL="1513378" indent="0" algn="ctr">
               <a:buNone/>
@@ -644,31 +551,31 @@
             </a:lvl2pPr>
             <a:lvl3pPr marL="3026755" indent="0" algn="ctr">
               <a:buNone/>
-              <a:defRPr sz="6620"/>
+              <a:defRPr sz="5958"/>
             </a:lvl3pPr>
             <a:lvl4pPr marL="4540133" indent="0" algn="ctr">
               <a:buNone/>
-              <a:defRPr sz="6620"/>
+              <a:defRPr sz="5296"/>
             </a:lvl4pPr>
             <a:lvl5pPr marL="6053511" indent="0" algn="ctr">
               <a:buNone/>
-              <a:defRPr sz="6620"/>
+              <a:defRPr sz="5296"/>
             </a:lvl5pPr>
             <a:lvl6pPr marL="7566889" indent="0" algn="ctr">
               <a:buNone/>
-              <a:defRPr sz="6620"/>
+              <a:defRPr sz="5296"/>
             </a:lvl6pPr>
             <a:lvl7pPr marL="9080266" indent="0" algn="ctr">
               <a:buNone/>
-              <a:defRPr sz="6620"/>
+              <a:defRPr sz="5296"/>
             </a:lvl7pPr>
             <a:lvl8pPr marL="10593644" indent="0" algn="ctr">
               <a:buNone/>
-              <a:defRPr sz="6620"/>
+              <a:defRPr sz="5296"/>
             </a:lvl8pPr>
             <a:lvl9pPr marL="12107022" indent="0" algn="ctr">
               <a:buNone/>
-              <a:defRPr sz="6620"/>
+              <a:defRPr sz="5296"/>
             </a:lvl9pPr>
           </a:lstStyle>
           <a:p>
@@ -748,7 +655,7 @@
     </p:spTree>
     <p:extLst>
       <p:ext uri="{BB962C8B-B14F-4D97-AF65-F5344CB8AC3E}">
-        <p14:creationId xmlns:p14="http://schemas.microsoft.com/office/powerpoint/2010/main" val="4150780616"/>
+        <p14:creationId xmlns:p14="http://schemas.microsoft.com/office/powerpoint/2010/main" val="2770259707"/>
       </p:ext>
     </p:extLst>
   </p:cSld>
@@ -810,7 +717,7 @@
         </p:nvSpPr>
         <p:spPr/>
         <p:txBody>
-          <a:bodyPr vert="eaVert" anchor="t"/>
+          <a:bodyPr vert="eaVert"/>
           <a:lstStyle/>
           <a:p>
             <a:pPr lvl="0"/>
@@ -852,7 +759,7 @@
       </p:sp>
       <p:sp>
         <p:nvSpPr>
-          <p:cNvPr id="7" name="Date Placeholder 6"/>
+          <p:cNvPr id="4" name="Date Placeholder 3"/>
           <p:cNvSpPr>
             <a:spLocks noGrp="1"/>
           </p:cNvSpPr>
@@ -875,7 +782,7 @@
       </p:sp>
       <p:sp>
         <p:nvSpPr>
-          <p:cNvPr id="8" name="Footer Placeholder 7"/>
+          <p:cNvPr id="5" name="Footer Placeholder 4"/>
           <p:cNvSpPr>
             <a:spLocks noGrp="1"/>
           </p:cNvSpPr>
@@ -894,7 +801,7 @@
       </p:sp>
       <p:sp>
         <p:nvSpPr>
-          <p:cNvPr id="9" name="Slide Number Placeholder 8"/>
+          <p:cNvPr id="6" name="Slide Number Placeholder 5"/>
           <p:cNvSpPr>
             <a:spLocks noGrp="1"/>
           </p:cNvSpPr>
@@ -918,7 +825,7 @@
     </p:spTree>
     <p:extLst>
       <p:ext uri="{BB962C8B-B14F-4D97-AF65-F5344CB8AC3E}">
-        <p14:creationId xmlns:p14="http://schemas.microsoft.com/office/powerpoint/2010/main" val="702200479"/>
+        <p14:creationId xmlns:p14="http://schemas.microsoft.com/office/powerpoint/2010/main" val="3299769349"/>
       </p:ext>
     </p:extLst>
   </p:cSld>
@@ -957,8 +864,8 @@
         </p:nvSpPr>
         <p:spPr>
           <a:xfrm>
-            <a:off x="945853" y="6181390"/>
-            <a:ext cx="6999307" cy="30906950"/>
+            <a:off x="21660020" y="2278397"/>
+            <a:ext cx="6526381" cy="36266139"/>
           </a:xfrm>
         </p:spPr>
         <p:txBody>
@@ -985,12 +892,12 @@
         </p:nvSpPr>
         <p:spPr>
           <a:xfrm>
-            <a:off x="9602293" y="5420604"/>
-            <a:ext cx="18160365" cy="31953031"/>
+            <a:off x="2080877" y="2278397"/>
+            <a:ext cx="19200803" cy="36266139"/>
           </a:xfrm>
         </p:spPr>
         <p:txBody>
-          <a:bodyPr vert="eaVert" anchor="t"/>
+          <a:bodyPr vert="eaVert"/>
           <a:lstStyle/>
           <a:p>
             <a:pPr lvl="0"/>
@@ -1032,7 +939,7 @@
       </p:sp>
       <p:sp>
         <p:nvSpPr>
-          <p:cNvPr id="7" name="Date Placeholder 6"/>
+          <p:cNvPr id="4" name="Date Placeholder 3"/>
           <p:cNvSpPr>
             <a:spLocks noGrp="1"/>
           </p:cNvSpPr>
@@ -1055,7 +962,7 @@
       </p:sp>
       <p:sp>
         <p:nvSpPr>
-          <p:cNvPr id="8" name="Footer Placeholder 7"/>
+          <p:cNvPr id="5" name="Footer Placeholder 4"/>
           <p:cNvSpPr>
             <a:spLocks noGrp="1"/>
           </p:cNvSpPr>
@@ -1074,7 +981,7 @@
       </p:sp>
       <p:sp>
         <p:nvSpPr>
-          <p:cNvPr id="9" name="Slide Number Placeholder 8"/>
+          <p:cNvPr id="6" name="Slide Number Placeholder 5"/>
           <p:cNvSpPr>
             <a:spLocks noGrp="1"/>
           </p:cNvSpPr>
@@ -1098,7 +1005,7 @@
     </p:spTree>
     <p:extLst>
       <p:ext uri="{BB962C8B-B14F-4D97-AF65-F5344CB8AC3E}">
-        <p14:creationId xmlns:p14="http://schemas.microsoft.com/office/powerpoint/2010/main" val="3374280210"/>
+        <p14:creationId xmlns:p14="http://schemas.microsoft.com/office/powerpoint/2010/main" val="765929595"/>
       </p:ext>
     </p:extLst>
   </p:cSld>
@@ -2640,7 +2547,7 @@
     </p:spTree>
     <p:extLst>
       <p:ext uri="{BB962C8B-B14F-4D97-AF65-F5344CB8AC3E}">
-        <p14:creationId xmlns:p14="http://schemas.microsoft.com/office/powerpoint/2010/main" val="3018308231"/>
+        <p14:creationId xmlns:p14="http://schemas.microsoft.com/office/powerpoint/2010/main" val="1355928882"/>
       </p:ext>
     </p:extLst>
   </p:cSld>
@@ -2810,7 +2717,7 @@
     </p:spTree>
     <p:extLst>
       <p:ext uri="{BB962C8B-B14F-4D97-AF65-F5344CB8AC3E}">
-        <p14:creationId xmlns:p14="http://schemas.microsoft.com/office/powerpoint/2010/main" val="1309742724"/>
+        <p14:creationId xmlns:p14="http://schemas.microsoft.com/office/powerpoint/2010/main" val="3858045785"/>
       </p:ext>
     </p:extLst>
   </p:cSld>
@@ -2849,24 +2756,15 @@
         </p:nvSpPr>
         <p:spPr>
           <a:xfrm>
-            <a:off x="9602293" y="8102376"/>
-            <a:ext cx="18160365" cy="20312998"/>
+            <a:off x="2065112" y="10668854"/>
+            <a:ext cx="26105525" cy="17801211"/>
           </a:xfrm>
         </p:spPr>
         <p:txBody>
-          <a:bodyPr anchor="b">
-            <a:normAutofit/>
-          </a:bodyPr>
+          <a:bodyPr anchor="b"/>
           <a:lstStyle>
             <a:lvl1pPr>
-              <a:defRPr sz="17875" b="0" spc="-331" baseline="0">
-                <a:solidFill>
-                  <a:schemeClr val="tx1">
-                    <a:lumMod val="65000"/>
-                    <a:lumOff val="35000"/>
-                  </a:schemeClr>
-                </a:solidFill>
-              </a:defRPr>
+              <a:defRPr sz="19861"/>
             </a:lvl1pPr>
           </a:lstStyle>
           <a:p>
@@ -2890,29 +2788,24 @@
         </p:nvSpPr>
         <p:spPr>
           <a:xfrm>
-            <a:off x="9647694" y="29157141"/>
-            <a:ext cx="18160365" cy="5705898"/>
+            <a:off x="2065112" y="28638472"/>
+            <a:ext cx="26105525" cy="9361236"/>
           </a:xfrm>
         </p:spPr>
         <p:txBody>
-          <a:bodyPr anchor="t">
-            <a:normAutofit/>
-          </a:bodyPr>
+          <a:bodyPr/>
           <a:lstStyle>
             <a:lvl1pPr marL="0" indent="0">
               <a:buNone/>
-              <a:defRPr sz="6620" cap="none" spc="0" baseline="0">
-                <a:solidFill>
-                  <a:schemeClr val="tx1">
-                    <a:lumMod val="65000"/>
-                    <a:lumOff val="35000"/>
-                  </a:schemeClr>
+              <a:defRPr sz="7944">
+                <a:solidFill>
+                  <a:schemeClr val="tx1"/>
                 </a:solidFill>
               </a:defRPr>
             </a:lvl1pPr>
             <a:lvl2pPr marL="1513378" indent="0">
               <a:buNone/>
-              <a:defRPr sz="5958">
+              <a:defRPr sz="6620">
                 <a:solidFill>
                   <a:schemeClr val="tx1">
                     <a:tint val="75000"/>
@@ -2922,7 +2815,7 @@
             </a:lvl2pPr>
             <a:lvl3pPr marL="3026755" indent="0">
               <a:buNone/>
-              <a:defRPr sz="5296">
+              <a:defRPr sz="5958">
                 <a:solidFill>
                   <a:schemeClr val="tx1">
                     <a:tint val="75000"/>
@@ -2932,7 +2825,7 @@
             </a:lvl3pPr>
             <a:lvl4pPr marL="4540133" indent="0">
               <a:buNone/>
-              <a:defRPr sz="4634">
+              <a:defRPr sz="5296">
                 <a:solidFill>
                   <a:schemeClr val="tx1">
                     <a:tint val="75000"/>
@@ -2942,7 +2835,7 @@
             </a:lvl4pPr>
             <a:lvl5pPr marL="6053511" indent="0">
               <a:buNone/>
-              <a:defRPr sz="4634">
+              <a:defRPr sz="5296">
                 <a:solidFill>
                   <a:schemeClr val="tx1">
                     <a:tint val="75000"/>
@@ -2952,7 +2845,7 @@
             </a:lvl5pPr>
             <a:lvl6pPr marL="7566889" indent="0">
               <a:buNone/>
-              <a:defRPr sz="4634">
+              <a:defRPr sz="5296">
                 <a:solidFill>
                   <a:schemeClr val="tx1">
                     <a:tint val="75000"/>
@@ -2962,7 +2855,7 @@
             </a:lvl6pPr>
             <a:lvl7pPr marL="9080266" indent="0">
               <a:buNone/>
-              <a:defRPr sz="4634">
+              <a:defRPr sz="5296">
                 <a:solidFill>
                   <a:schemeClr val="tx1">
                     <a:tint val="75000"/>
@@ -2972,7 +2865,7 @@
             </a:lvl7pPr>
             <a:lvl8pPr marL="10593644" indent="0">
               <a:buNone/>
-              <a:defRPr sz="4634">
+              <a:defRPr sz="5296">
                 <a:solidFill>
                   <a:schemeClr val="tx1">
                     <a:tint val="75000"/>
@@ -2982,7 +2875,7 @@
             </a:lvl8pPr>
             <a:lvl9pPr marL="12107022" indent="0">
               <a:buNone/>
-              <a:defRPr sz="4634">
+              <a:defRPr sz="5296">
                 <a:solidFill>
                   <a:schemeClr val="tx1">
                     <a:tint val="75000"/>
@@ -3068,7 +2961,7 @@
     </p:spTree>
     <p:extLst>
       <p:ext uri="{BB962C8B-B14F-4D97-AF65-F5344CB8AC3E}">
-        <p14:creationId xmlns:p14="http://schemas.microsoft.com/office/powerpoint/2010/main" val="3351076721"/>
+        <p14:creationId xmlns:p14="http://schemas.microsoft.com/office/powerpoint/2010/main" val="163282756"/>
       </p:ext>
     </p:extLst>
   </p:cSld>
@@ -3130,41 +3023,13 @@
         </p:nvSpPr>
         <p:spPr>
           <a:xfrm>
-            <a:off x="9602293" y="5420604"/>
-            <a:ext cx="8626173" cy="31953031"/>
+            <a:off x="2080875" y="11391985"/>
+            <a:ext cx="12863592" cy="27152551"/>
           </a:xfrm>
         </p:spPr>
         <p:txBody>
           <a:bodyPr/>
-          <a:lstStyle>
-            <a:lvl1pPr>
-              <a:defRPr sz="6289"/>
-            </a:lvl1pPr>
-            <a:lvl2pPr>
-              <a:defRPr sz="5627"/>
-            </a:lvl2pPr>
-            <a:lvl3pPr>
-              <a:defRPr sz="4965"/>
-            </a:lvl3pPr>
-            <a:lvl4pPr>
-              <a:defRPr sz="4303"/>
-            </a:lvl4pPr>
-            <a:lvl5pPr>
-              <a:defRPr sz="4303"/>
-            </a:lvl5pPr>
-            <a:lvl6pPr>
-              <a:defRPr sz="4303"/>
-            </a:lvl6pPr>
-            <a:lvl7pPr>
-              <a:defRPr sz="4303"/>
-            </a:lvl7pPr>
-            <a:lvl8pPr>
-              <a:defRPr sz="4303"/>
-            </a:lvl8pPr>
-            <a:lvl9pPr>
-              <a:defRPr sz="4303"/>
-            </a:lvl9pPr>
-          </a:lstStyle>
+          <a:lstStyle/>
           <a:p>
             <a:pPr lvl="0"/>
             <a:r>
@@ -3215,41 +3080,13 @@
         </p:nvSpPr>
         <p:spPr>
           <a:xfrm>
-            <a:off x="19408890" y="5420604"/>
-            <a:ext cx="8626173" cy="31953031"/>
+            <a:off x="15322808" y="11391985"/>
+            <a:ext cx="12863592" cy="27152551"/>
           </a:xfrm>
         </p:spPr>
         <p:txBody>
           <a:bodyPr/>
-          <a:lstStyle>
-            <a:lvl1pPr>
-              <a:defRPr sz="6289"/>
-            </a:lvl1pPr>
-            <a:lvl2pPr>
-              <a:defRPr sz="5627"/>
-            </a:lvl2pPr>
-            <a:lvl3pPr>
-              <a:defRPr sz="4965"/>
-            </a:lvl3pPr>
-            <a:lvl4pPr>
-              <a:defRPr sz="4303"/>
-            </a:lvl4pPr>
-            <a:lvl5pPr>
-              <a:defRPr sz="4303"/>
-            </a:lvl5pPr>
-            <a:lvl6pPr>
-              <a:defRPr sz="4303"/>
-            </a:lvl6pPr>
-            <a:lvl7pPr>
-              <a:defRPr sz="4303"/>
-            </a:lvl7pPr>
-            <a:lvl8pPr>
-              <a:defRPr sz="4303"/>
-            </a:lvl8pPr>
-            <a:lvl9pPr>
-              <a:defRPr sz="4303"/>
-            </a:lvl9pPr>
-          </a:lstStyle>
+          <a:lstStyle/>
           <a:p>
             <a:pPr lvl="0"/>
             <a:r>
@@ -3290,7 +3127,7 @@
       </p:sp>
       <p:sp>
         <p:nvSpPr>
-          <p:cNvPr id="8" name="Date Placeholder 7"/>
+          <p:cNvPr id="5" name="Date Placeholder 4"/>
           <p:cNvSpPr>
             <a:spLocks noGrp="1"/>
           </p:cNvSpPr>
@@ -3313,7 +3150,7 @@
       </p:sp>
       <p:sp>
         <p:nvSpPr>
-          <p:cNvPr id="9" name="Footer Placeholder 8"/>
+          <p:cNvPr id="6" name="Footer Placeholder 5"/>
           <p:cNvSpPr>
             <a:spLocks noGrp="1"/>
           </p:cNvSpPr>
@@ -3332,7 +3169,7 @@
       </p:sp>
       <p:sp>
         <p:nvSpPr>
-          <p:cNvPr id="10" name="Slide Number Placeholder 9"/>
+          <p:cNvPr id="7" name="Slide Number Placeholder 6"/>
           <p:cNvSpPr>
             <a:spLocks noGrp="1"/>
           </p:cNvSpPr>
@@ -3356,7 +3193,7 @@
     </p:spTree>
     <p:extLst>
       <p:ext uri="{BB962C8B-B14F-4D97-AF65-F5344CB8AC3E}">
-        <p14:creationId xmlns:p14="http://schemas.microsoft.com/office/powerpoint/2010/main" val="3642208553"/>
+        <p14:creationId xmlns:p14="http://schemas.microsoft.com/office/powerpoint/2010/main" val="286962615"/>
       </p:ext>
     </p:extLst>
   </p:cSld>
@@ -3385,7 +3222,7 @@
       </p:grpSpPr>
       <p:sp>
         <p:nvSpPr>
-          <p:cNvPr id="10" name="Title 9"/>
+          <p:cNvPr id="2" name="Title 1"/>
           <p:cNvSpPr>
             <a:spLocks noGrp="1"/>
           </p:cNvSpPr>
@@ -3393,7 +3230,12 @@
             <p:ph type="title"/>
           </p:nvPr>
         </p:nvSpPr>
-        <p:spPr/>
+        <p:spPr>
+          <a:xfrm>
+            <a:off x="2084817" y="2278406"/>
+            <a:ext cx="26105525" cy="8271575"/>
+          </a:xfrm>
+        </p:spPr>
         <p:txBody>
           <a:bodyPr/>
           <a:lstStyle/>
@@ -3418,32 +3260,20 @@
         </p:nvSpPr>
         <p:spPr>
           <a:xfrm>
-            <a:off x="9602293" y="6387224"/>
-            <a:ext cx="8626173" cy="5040210"/>
+            <a:off x="2084821" y="10490535"/>
+            <a:ext cx="12804474" cy="5141249"/>
           </a:xfrm>
         </p:spPr>
         <p:txBody>
-          <a:bodyPr anchor="b">
-            <a:normAutofit/>
-          </a:bodyPr>
+          <a:bodyPr anchor="b"/>
           <a:lstStyle>
             <a:lvl1pPr marL="0" indent="0">
-              <a:spcBef>
-                <a:spcPts val="0"/>
-              </a:spcBef>
               <a:buNone/>
-              <a:defRPr sz="6289" b="1">
-                <a:solidFill>
-                  <a:schemeClr val="tx1">
-                    <a:lumMod val="65000"/>
-                    <a:lumOff val="35000"/>
-                  </a:schemeClr>
-                </a:solidFill>
-              </a:defRPr>
+              <a:defRPr sz="7944" b="1"/>
             </a:lvl1pPr>
             <a:lvl2pPr marL="1513378" indent="0">
               <a:buNone/>
-              <a:defRPr sz="6289" b="1"/>
+              <a:defRPr sz="6620" b="1"/>
             </a:lvl2pPr>
             <a:lvl3pPr marL="3026755" indent="0">
               <a:buNone/>
@@ -3495,41 +3325,13 @@
         </p:nvSpPr>
         <p:spPr>
           <a:xfrm>
-            <a:off x="9602293" y="12049130"/>
-            <a:ext cx="8626173" cy="25105953"/>
+            <a:off x="2084821" y="15631784"/>
+            <a:ext cx="12804474" cy="22992000"/>
           </a:xfrm>
         </p:spPr>
         <p:txBody>
           <a:bodyPr/>
-          <a:lstStyle>
-            <a:lvl1pPr>
-              <a:defRPr sz="6289"/>
-            </a:lvl1pPr>
-            <a:lvl2pPr>
-              <a:defRPr sz="5627"/>
-            </a:lvl2pPr>
-            <a:lvl3pPr>
-              <a:defRPr sz="4965"/>
-            </a:lvl3pPr>
-            <a:lvl4pPr>
-              <a:defRPr sz="4303"/>
-            </a:lvl4pPr>
-            <a:lvl5pPr>
-              <a:defRPr sz="4303"/>
-            </a:lvl5pPr>
-            <a:lvl6pPr>
-              <a:defRPr sz="4303"/>
-            </a:lvl6pPr>
-            <a:lvl7pPr>
-              <a:defRPr sz="4303"/>
-            </a:lvl7pPr>
-            <a:lvl8pPr>
-              <a:defRPr sz="4303"/>
-            </a:lvl8pPr>
-            <a:lvl9pPr>
-              <a:defRPr sz="4303"/>
-            </a:lvl9pPr>
-          </a:lstStyle>
+          <a:lstStyle/>
           <a:p>
             <a:pPr lvl="0"/>
             <a:r>
@@ -3580,32 +3382,20 @@
         </p:nvSpPr>
         <p:spPr>
           <a:xfrm>
-            <a:off x="19409741" y="6387233"/>
-            <a:ext cx="8626173" cy="5074225"/>
+            <a:off x="15322810" y="10490535"/>
+            <a:ext cx="12867534" cy="5141249"/>
           </a:xfrm>
         </p:spPr>
         <p:txBody>
-          <a:bodyPr anchor="b">
-            <a:normAutofit/>
-          </a:bodyPr>
+          <a:bodyPr anchor="b"/>
           <a:lstStyle>
             <a:lvl1pPr marL="0" indent="0">
-              <a:spcBef>
-                <a:spcPts val="0"/>
-              </a:spcBef>
               <a:buNone/>
-              <a:defRPr sz="6289" b="1">
-                <a:solidFill>
-                  <a:schemeClr val="tx1">
-                    <a:lumMod val="65000"/>
-                    <a:lumOff val="35000"/>
-                  </a:schemeClr>
-                </a:solidFill>
-              </a:defRPr>
+              <a:defRPr sz="7944" b="1"/>
             </a:lvl1pPr>
             <a:lvl2pPr marL="1513378" indent="0">
               <a:buNone/>
-              <a:defRPr sz="6289" b="1"/>
+              <a:defRPr sz="6620" b="1"/>
             </a:lvl2pPr>
             <a:lvl3pPr marL="3026755" indent="0">
               <a:buNone/>
@@ -3657,41 +3447,13 @@
         </p:nvSpPr>
         <p:spPr>
           <a:xfrm>
-            <a:off x="19409741" y="12049130"/>
-            <a:ext cx="8626173" cy="25105953"/>
+            <a:off x="15322810" y="15631784"/>
+            <a:ext cx="12867534" cy="22992000"/>
           </a:xfrm>
         </p:spPr>
         <p:txBody>
           <a:bodyPr/>
-          <a:lstStyle>
-            <a:lvl1pPr>
-              <a:defRPr sz="6289"/>
-            </a:lvl1pPr>
-            <a:lvl2pPr>
-              <a:defRPr sz="5627"/>
-            </a:lvl2pPr>
-            <a:lvl3pPr>
-              <a:defRPr sz="4965"/>
-            </a:lvl3pPr>
-            <a:lvl4pPr>
-              <a:defRPr sz="4303"/>
-            </a:lvl4pPr>
-            <a:lvl5pPr>
-              <a:defRPr sz="4303"/>
-            </a:lvl5pPr>
-            <a:lvl6pPr>
-              <a:defRPr sz="4303"/>
-            </a:lvl6pPr>
-            <a:lvl7pPr>
-              <a:defRPr sz="4303"/>
-            </a:lvl7pPr>
-            <a:lvl8pPr>
-              <a:defRPr sz="4303"/>
-            </a:lvl8pPr>
-            <a:lvl9pPr>
-              <a:defRPr sz="4303"/>
-            </a:lvl9pPr>
-          </a:lstStyle>
+          <a:lstStyle/>
           <a:p>
             <a:pPr lvl="0"/>
             <a:r>
@@ -3732,7 +3494,7 @@
       </p:sp>
       <p:sp>
         <p:nvSpPr>
-          <p:cNvPr id="2" name="Date Placeholder 1"/>
+          <p:cNvPr id="7" name="Date Placeholder 6"/>
           <p:cNvSpPr>
             <a:spLocks noGrp="1"/>
           </p:cNvSpPr>
@@ -3755,7 +3517,7 @@
       </p:sp>
       <p:sp>
         <p:nvSpPr>
-          <p:cNvPr id="11" name="Footer Placeholder 10"/>
+          <p:cNvPr id="8" name="Footer Placeholder 7"/>
           <p:cNvSpPr>
             <a:spLocks noGrp="1"/>
           </p:cNvSpPr>
@@ -3774,7 +3536,7 @@
       </p:sp>
       <p:sp>
         <p:nvSpPr>
-          <p:cNvPr id="12" name="Slide Number Placeholder 11"/>
+          <p:cNvPr id="9" name="Slide Number Placeholder 8"/>
           <p:cNvSpPr>
             <a:spLocks noGrp="1"/>
           </p:cNvSpPr>
@@ -3798,7 +3560,7 @@
     </p:spTree>
     <p:extLst>
       <p:ext uri="{BB962C8B-B14F-4D97-AF65-F5344CB8AC3E}">
-        <p14:creationId xmlns:p14="http://schemas.microsoft.com/office/powerpoint/2010/main" val="3691871683"/>
+        <p14:creationId xmlns:p14="http://schemas.microsoft.com/office/powerpoint/2010/main" val="792090679"/>
       </p:ext>
     </p:extLst>
   </p:cSld>
@@ -3827,7 +3589,7 @@
       </p:grpSpPr>
       <p:sp>
         <p:nvSpPr>
-          <p:cNvPr id="6" name="Title 5"/>
+          <p:cNvPr id="2" name="Title 1"/>
           <p:cNvSpPr>
             <a:spLocks noGrp="1"/>
           </p:cNvSpPr>
@@ -3850,7 +3612,7 @@
       </p:sp>
       <p:sp>
         <p:nvSpPr>
-          <p:cNvPr id="2" name="Date Placeholder 1"/>
+          <p:cNvPr id="3" name="Date Placeholder 2"/>
           <p:cNvSpPr>
             <a:spLocks noGrp="1"/>
           </p:cNvSpPr>
@@ -3873,7 +3635,7 @@
       </p:sp>
       <p:sp>
         <p:nvSpPr>
-          <p:cNvPr id="7" name="Footer Placeholder 6"/>
+          <p:cNvPr id="4" name="Footer Placeholder 3"/>
           <p:cNvSpPr>
             <a:spLocks noGrp="1"/>
           </p:cNvSpPr>
@@ -3892,7 +3654,7 @@
       </p:sp>
       <p:sp>
         <p:nvSpPr>
-          <p:cNvPr id="8" name="Slide Number Placeholder 7"/>
+          <p:cNvPr id="5" name="Slide Number Placeholder 4"/>
           <p:cNvSpPr>
             <a:spLocks noGrp="1"/>
           </p:cNvSpPr>
@@ -3916,7 +3678,7 @@
     </p:spTree>
     <p:extLst>
       <p:ext uri="{BB962C8B-B14F-4D97-AF65-F5344CB8AC3E}">
-        <p14:creationId xmlns:p14="http://schemas.microsoft.com/office/powerpoint/2010/main" val="2417914847"/>
+        <p14:creationId xmlns:p14="http://schemas.microsoft.com/office/powerpoint/2010/main" val="1792429536"/>
       </p:ext>
     </p:extLst>
   </p:cSld>
@@ -3927,7 +3689,7 @@
 </file>
 
 <file path=ppt/slideLayouts/slideLayout7.xml><?xml version="1.0" encoding="utf-8"?>
-<p:sldLayout xmlns:a="http://schemas.openxmlformats.org/drawingml/2006/main" xmlns:r="http://schemas.openxmlformats.org/officeDocument/2006/relationships" xmlns:p="http://schemas.openxmlformats.org/presentationml/2006/main" showMasterSp="0" type="blank" preserve="1">
+<p:sldLayout xmlns:a="http://schemas.openxmlformats.org/drawingml/2006/main" xmlns:r="http://schemas.openxmlformats.org/officeDocument/2006/relationships" xmlns:p="http://schemas.openxmlformats.org/presentationml/2006/main" type="blank" preserve="1">
   <p:cSld name="Blank">
     <p:spTree>
       <p:nvGrpSpPr>
@@ -3945,7 +3707,7 @@
       </p:grpSpPr>
       <p:sp>
         <p:nvSpPr>
-          <p:cNvPr id="5" name="Date Placeholder 4"/>
+          <p:cNvPr id="2" name="Date Placeholder 1"/>
           <p:cNvSpPr>
             <a:spLocks noGrp="1"/>
           </p:cNvSpPr>
@@ -3968,7 +3730,7 @@
       </p:sp>
       <p:sp>
         <p:nvSpPr>
-          <p:cNvPr id="6" name="Footer Placeholder 5"/>
+          <p:cNvPr id="3" name="Footer Placeholder 2"/>
           <p:cNvSpPr>
             <a:spLocks noGrp="1"/>
           </p:cNvSpPr>
@@ -3987,7 +3749,7 @@
       </p:sp>
       <p:sp>
         <p:nvSpPr>
-          <p:cNvPr id="7" name="Slide Number Placeholder 6"/>
+          <p:cNvPr id="4" name="Slide Number Placeholder 3"/>
           <p:cNvSpPr>
             <a:spLocks noGrp="1"/>
           </p:cNvSpPr>
@@ -4011,7 +3773,7 @@
     </p:spTree>
     <p:extLst>
       <p:ext uri="{BB962C8B-B14F-4D97-AF65-F5344CB8AC3E}">
-        <p14:creationId xmlns:p14="http://schemas.microsoft.com/office/powerpoint/2010/main" val="1158012912"/>
+        <p14:creationId xmlns:p14="http://schemas.microsoft.com/office/powerpoint/2010/main" val="207945241"/>
       </p:ext>
     </p:extLst>
   </p:cSld>
@@ -4050,17 +3812,15 @@
         </p:nvSpPr>
         <p:spPr>
           <a:xfrm>
-            <a:off x="635613" y="7132373"/>
-            <a:ext cx="7037141" cy="13694156"/>
+            <a:off x="2084817" y="2852949"/>
+            <a:ext cx="9761984" cy="9985322"/>
           </a:xfrm>
         </p:spPr>
         <p:txBody>
-          <a:bodyPr anchor="b">
-            <a:normAutofit/>
-          </a:bodyPr>
+          <a:bodyPr anchor="b"/>
           <a:lstStyle>
             <a:lvl1pPr>
-              <a:defRPr sz="9268" b="0" baseline="0"/>
+              <a:defRPr sz="10592"/>
             </a:lvl1pPr>
           </a:lstStyle>
           <a:p>
@@ -4084,39 +3844,39 @@
         </p:nvSpPr>
         <p:spPr>
           <a:xfrm>
-            <a:off x="9602293" y="5420604"/>
-            <a:ext cx="18160365" cy="31953031"/>
+            <a:off x="12867534" y="6161587"/>
+            <a:ext cx="15322808" cy="30411646"/>
           </a:xfrm>
         </p:spPr>
         <p:txBody>
           <a:bodyPr/>
           <a:lstStyle>
             <a:lvl1pPr>
-              <a:defRPr sz="6620"/>
+              <a:defRPr sz="10592"/>
             </a:lvl1pPr>
             <a:lvl2pPr>
-              <a:defRPr sz="5958"/>
+              <a:defRPr sz="9268"/>
             </a:lvl2pPr>
             <a:lvl3pPr>
-              <a:defRPr sz="5296"/>
+              <a:defRPr sz="7944"/>
             </a:lvl3pPr>
             <a:lvl4pPr>
-              <a:defRPr sz="4634"/>
+              <a:defRPr sz="6620"/>
             </a:lvl4pPr>
             <a:lvl5pPr>
-              <a:defRPr sz="4634"/>
+              <a:defRPr sz="6620"/>
             </a:lvl5pPr>
             <a:lvl6pPr>
-              <a:defRPr sz="4634"/>
+              <a:defRPr sz="6620"/>
             </a:lvl6pPr>
             <a:lvl7pPr>
-              <a:defRPr sz="4634"/>
+              <a:defRPr sz="6620"/>
             </a:lvl7pPr>
             <a:lvl8pPr>
-              <a:defRPr sz="4634"/>
+              <a:defRPr sz="6620"/>
             </a:lvl8pPr>
             <a:lvl9pPr>
-              <a:defRPr sz="4634"/>
+              <a:defRPr sz="6620"/>
             </a:lvl9pPr>
           </a:lstStyle>
           <a:p>
@@ -4169,60 +3929,48 @@
         </p:nvSpPr>
         <p:spPr>
           <a:xfrm>
-            <a:off x="635613" y="20826529"/>
-            <a:ext cx="7037141" cy="15976516"/>
+            <a:off x="2084817" y="12838271"/>
+            <a:ext cx="9761984" cy="23784486"/>
           </a:xfrm>
         </p:spPr>
         <p:txBody>
-          <a:bodyPr anchor="t">
-            <a:normAutofit/>
-          </a:bodyPr>
+          <a:bodyPr/>
           <a:lstStyle>
             <a:lvl1pPr marL="0" indent="0">
-              <a:lnSpc>
-                <a:spcPct val="100000"/>
-              </a:lnSpc>
-              <a:spcBef>
-                <a:spcPts val="2648"/>
-              </a:spcBef>
               <a:buNone/>
-              <a:defRPr sz="4138">
-                <a:solidFill>
-                  <a:srgbClr val="FFFFFF"/>
-                </a:solidFill>
-              </a:defRPr>
+              <a:defRPr sz="5296"/>
             </a:lvl1pPr>
             <a:lvl2pPr marL="1513378" indent="0">
               <a:buNone/>
-              <a:defRPr sz="3972"/>
+              <a:defRPr sz="4634"/>
             </a:lvl2pPr>
             <a:lvl3pPr marL="3026755" indent="0">
               <a:buNone/>
-              <a:defRPr sz="3310"/>
+              <a:defRPr sz="3972"/>
             </a:lvl3pPr>
             <a:lvl4pPr marL="4540133" indent="0">
               <a:buNone/>
-              <a:defRPr sz="2979"/>
+              <a:defRPr sz="3310"/>
             </a:lvl4pPr>
             <a:lvl5pPr marL="6053511" indent="0">
               <a:buNone/>
-              <a:defRPr sz="2979"/>
+              <a:defRPr sz="3310"/>
             </a:lvl5pPr>
             <a:lvl6pPr marL="7566889" indent="0">
               <a:buNone/>
-              <a:defRPr sz="2979"/>
+              <a:defRPr sz="3310"/>
             </a:lvl6pPr>
             <a:lvl7pPr marL="9080266" indent="0">
               <a:buNone/>
-              <a:defRPr sz="2979"/>
+              <a:defRPr sz="3310"/>
             </a:lvl7pPr>
             <a:lvl8pPr marL="10593644" indent="0">
               <a:buNone/>
-              <a:defRPr sz="2979"/>
+              <a:defRPr sz="3310"/>
             </a:lvl8pPr>
             <a:lvl9pPr marL="12107022" indent="0">
               <a:buNone/>
-              <a:defRPr sz="2979"/>
+              <a:defRPr sz="3310"/>
             </a:lvl9pPr>
           </a:lstStyle>
           <a:p>
@@ -4236,7 +3984,7 @@
       </p:sp>
       <p:sp>
         <p:nvSpPr>
-          <p:cNvPr id="8" name="Date Placeholder 7"/>
+          <p:cNvPr id="5" name="Date Placeholder 4"/>
           <p:cNvSpPr>
             <a:spLocks noGrp="1"/>
           </p:cNvSpPr>
@@ -4259,7 +4007,7 @@
       </p:sp>
       <p:sp>
         <p:nvSpPr>
-          <p:cNvPr id="9" name="Footer Placeholder 8"/>
+          <p:cNvPr id="6" name="Footer Placeholder 5"/>
           <p:cNvSpPr>
             <a:spLocks noGrp="1"/>
           </p:cNvSpPr>
@@ -4278,7 +4026,7 @@
       </p:sp>
       <p:sp>
         <p:nvSpPr>
-          <p:cNvPr id="10" name="Slide Number Placeholder 9"/>
+          <p:cNvPr id="7" name="Slide Number Placeholder 6"/>
           <p:cNvSpPr>
             <a:spLocks noGrp="1"/>
           </p:cNvSpPr>
@@ -4302,7 +4050,7 @@
     </p:spTree>
     <p:extLst>
       <p:ext uri="{BB962C8B-B14F-4D97-AF65-F5344CB8AC3E}">
-        <p14:creationId xmlns:p14="http://schemas.microsoft.com/office/powerpoint/2010/main" val="9491614"/>
+        <p14:creationId xmlns:p14="http://schemas.microsoft.com/office/powerpoint/2010/main" val="4232863826"/>
       </p:ext>
     </p:extLst>
   </p:cSld>
@@ -4341,17 +4089,15 @@
         </p:nvSpPr>
         <p:spPr>
           <a:xfrm>
-            <a:off x="635613" y="7132373"/>
-            <a:ext cx="7037141" cy="13694156"/>
+            <a:off x="2084817" y="2852949"/>
+            <a:ext cx="9761984" cy="9985322"/>
           </a:xfrm>
         </p:spPr>
         <p:txBody>
-          <a:bodyPr anchor="b">
-            <a:normAutofit/>
-          </a:bodyPr>
+          <a:bodyPr anchor="b"/>
           <a:lstStyle>
             <a:lvl1pPr>
-              <a:defRPr sz="9268" b="0"/>
+              <a:defRPr sz="10592"/>
             </a:lvl1pPr>
           </a:lstStyle>
           <a:p>
@@ -4375,14 +4121,9 @@
         </p:nvSpPr>
         <p:spPr>
           <a:xfrm>
-            <a:off x="8864311" y="4788730"/>
-            <a:ext cx="20146483" cy="33265388"/>
+            <a:off x="12867534" y="6161587"/>
+            <a:ext cx="15322808" cy="30411646"/>
           </a:xfrm>
-          <a:solidFill>
-            <a:schemeClr val="bg1">
-              <a:lumMod val="75000"/>
-            </a:schemeClr>
-          </a:solidFill>
         </p:spPr>
         <p:txBody>
           <a:bodyPr anchor="t"/>
@@ -4445,60 +4186,48 @@
         </p:nvSpPr>
         <p:spPr>
           <a:xfrm>
-            <a:off x="635613" y="20845511"/>
-            <a:ext cx="7037141" cy="15976516"/>
+            <a:off x="2084817" y="12838271"/>
+            <a:ext cx="9761984" cy="23784486"/>
           </a:xfrm>
         </p:spPr>
         <p:txBody>
-          <a:bodyPr anchor="t">
-            <a:normAutofit/>
-          </a:bodyPr>
+          <a:bodyPr/>
           <a:lstStyle>
             <a:lvl1pPr marL="0" indent="0">
-              <a:lnSpc>
-                <a:spcPct val="100000"/>
-              </a:lnSpc>
-              <a:spcBef>
-                <a:spcPts val="2648"/>
-              </a:spcBef>
               <a:buNone/>
-              <a:defRPr sz="4138">
-                <a:solidFill>
-                  <a:srgbClr val="FFFFFF"/>
-                </a:solidFill>
-              </a:defRPr>
+              <a:defRPr sz="5296"/>
             </a:lvl1pPr>
             <a:lvl2pPr marL="1513378" indent="0">
               <a:buNone/>
-              <a:defRPr sz="3972"/>
+              <a:defRPr sz="4634"/>
             </a:lvl2pPr>
             <a:lvl3pPr marL="3026755" indent="0">
               <a:buNone/>
-              <a:defRPr sz="3310"/>
+              <a:defRPr sz="3972"/>
             </a:lvl3pPr>
             <a:lvl4pPr marL="4540133" indent="0">
               <a:buNone/>
-              <a:defRPr sz="2979"/>
+              <a:defRPr sz="3310"/>
             </a:lvl4pPr>
             <a:lvl5pPr marL="6053511" indent="0">
               <a:buNone/>
-              <a:defRPr sz="2979"/>
+              <a:defRPr sz="3310"/>
             </a:lvl5pPr>
             <a:lvl6pPr marL="7566889" indent="0">
               <a:buNone/>
-              <a:defRPr sz="2979"/>
+              <a:defRPr sz="3310"/>
             </a:lvl6pPr>
             <a:lvl7pPr marL="9080266" indent="0">
               <a:buNone/>
-              <a:defRPr sz="2979"/>
+              <a:defRPr sz="3310"/>
             </a:lvl7pPr>
             <a:lvl8pPr marL="10593644" indent="0">
               <a:buNone/>
-              <a:defRPr sz="2979"/>
+              <a:defRPr sz="3310"/>
             </a:lvl8pPr>
             <a:lvl9pPr marL="12107022" indent="0">
               <a:buNone/>
-              <a:defRPr sz="2979"/>
+              <a:defRPr sz="3310"/>
             </a:lvl9pPr>
           </a:lstStyle>
           <a:p>
@@ -4512,7 +4241,7 @@
       </p:sp>
       <p:sp>
         <p:nvSpPr>
-          <p:cNvPr id="8" name="Date Placeholder 7"/>
+          <p:cNvPr id="5" name="Date Placeholder 4"/>
           <p:cNvSpPr>
             <a:spLocks noGrp="1"/>
           </p:cNvSpPr>
@@ -4535,7 +4264,7 @@
       </p:sp>
       <p:sp>
         <p:nvSpPr>
-          <p:cNvPr id="9" name="Footer Placeholder 8"/>
+          <p:cNvPr id="6" name="Footer Placeholder 5"/>
           <p:cNvSpPr>
             <a:spLocks noGrp="1"/>
           </p:cNvSpPr>
@@ -4543,12 +4272,7 @@
             <p:ph type="ftr" sz="quarter" idx="11"/>
           </p:nvPr>
         </p:nvSpPr>
-        <p:spPr>
-          <a:xfrm>
-            <a:off x="8686701" y="39663928"/>
-            <a:ext cx="14675650" cy="2278397"/>
-          </a:xfrm>
-        </p:spPr>
+        <p:spPr/>
         <p:txBody>
           <a:bodyPr/>
           <a:lstStyle/>
@@ -4559,7 +4283,7 @@
       </p:sp>
       <p:sp>
         <p:nvSpPr>
-          <p:cNvPr id="10" name="Slide Number Placeholder 9"/>
+          <p:cNvPr id="7" name="Slide Number Placeholder 6"/>
           <p:cNvSpPr>
             <a:spLocks noGrp="1"/>
           </p:cNvSpPr>
@@ -4583,7 +4307,7 @@
     </p:spTree>
     <p:extLst>
       <p:ext uri="{BB962C8B-B14F-4D97-AF65-F5344CB8AC3E}">
-        <p14:creationId xmlns:p14="http://schemas.microsoft.com/office/powerpoint/2010/main" val="836444810"/>
+        <p14:creationId xmlns:p14="http://schemas.microsoft.com/office/powerpoint/2010/main" val="1088199619"/>
       </p:ext>
     </p:extLst>
   </p:cSld>
@@ -4617,44 +4341,6 @@
       </p:grpSpPr>
       <p:sp>
         <p:nvSpPr>
-          <p:cNvPr id="7" name="Rectangle 6"/>
-          <p:cNvSpPr/>
-          <p:nvPr/>
-        </p:nvSpPr>
-        <p:spPr>
-          <a:xfrm>
-            <a:off x="5" y="4735896"/>
-            <a:ext cx="8548893" cy="33265388"/>
-          </a:xfrm>
-          <a:prstGeom prst="rect">
-            <a:avLst/>
-          </a:prstGeom>
-          <a:solidFill>
-            <a:schemeClr val="accent1"/>
-          </a:solidFill>
-          <a:ln>
-            <a:noFill/>
-          </a:ln>
-        </p:spPr>
-        <p:style>
-          <a:lnRef idx="2">
-            <a:schemeClr val="accent1">
-              <a:shade val="50000"/>
-            </a:schemeClr>
-          </a:lnRef>
-          <a:fillRef idx="1">
-            <a:schemeClr val="accent1"/>
-          </a:fillRef>
-          <a:effectRef idx="0">
-            <a:schemeClr val="accent1"/>
-          </a:effectRef>
-          <a:fontRef idx="minor">
-            <a:schemeClr val="lt1"/>
-          </a:fontRef>
-        </p:style>
-      </p:sp>
-      <p:sp>
-        <p:nvSpPr>
           <p:cNvPr id="2" name="Title Placeholder 1"/>
           <p:cNvSpPr>
             <a:spLocks noGrp="1"/>
@@ -4665,8 +4351,8 @@
         </p:nvSpPr>
         <p:spPr>
           <a:xfrm>
-            <a:off x="627884" y="7012804"/>
-            <a:ext cx="7317279" cy="28711595"/>
+            <a:off x="2080875" y="2278406"/>
+            <a:ext cx="26105525" cy="8271575"/>
           </a:xfrm>
           <a:prstGeom prst="rect">
             <a:avLst/>
@@ -4685,46 +4371,6 @@
             <a:endParaRPr lang="en-US" dirty="0"/>
           </a:p>
         </p:txBody>
-      </p:sp>
-      <p:sp>
-        <p:nvSpPr>
-          <p:cNvPr id="38" name="Rectangle 37"/>
-          <p:cNvSpPr/>
-          <p:nvPr/>
-        </p:nvSpPr>
-        <p:spPr>
-          <a:xfrm>
-            <a:off x="29333498" y="4735896"/>
-            <a:ext cx="953419" cy="33265388"/>
-          </a:xfrm>
-          <a:prstGeom prst="rect">
-            <a:avLst/>
-          </a:prstGeom>
-          <a:solidFill>
-            <a:srgbClr val="C8C8C8">
-              <a:alpha val="49804"/>
-            </a:srgbClr>
-          </a:solidFill>
-          <a:ln>
-            <a:noFill/>
-          </a:ln>
-        </p:spPr>
-        <p:style>
-          <a:lnRef idx="2">
-            <a:schemeClr val="accent1">
-              <a:shade val="50000"/>
-            </a:schemeClr>
-          </a:lnRef>
-          <a:fillRef idx="1">
-            <a:schemeClr val="accent1"/>
-          </a:fillRef>
-          <a:effectRef idx="0">
-            <a:schemeClr val="accent1"/>
-          </a:effectRef>
-          <a:fontRef idx="minor">
-            <a:schemeClr val="lt1"/>
-          </a:fontRef>
-        </p:style>
       </p:sp>
       <p:sp>
         <p:nvSpPr>
@@ -4738,15 +4384,15 @@
         </p:nvSpPr>
         <p:spPr>
           <a:xfrm>
-            <a:off x="9605659" y="5392074"/>
-            <a:ext cx="18160365" cy="31953031"/>
+            <a:off x="2080875" y="11391985"/>
+            <a:ext cx="26105525" cy="27152551"/>
           </a:xfrm>
           <a:prstGeom prst="rect">
             <a:avLst/>
           </a:prstGeom>
         </p:spPr>
         <p:txBody>
-          <a:bodyPr vert="horz" lIns="91440" tIns="45720" rIns="91440" bIns="45720" rtlCol="0" anchor="ctr">
+          <a:bodyPr vert="horz" lIns="91440" tIns="45720" rIns="91440" bIns="45720" rtlCol="0">
             <a:normAutofit/>
           </a:bodyPr>
           <a:lstStyle/>
@@ -4800,7 +4446,7 @@
         </p:nvSpPr>
         <p:spPr>
           <a:xfrm>
-            <a:off x="651584" y="39663928"/>
+            <a:off x="2080875" y="39663928"/>
             <a:ext cx="6810137" cy="2278397"/>
           </a:xfrm>
           <a:prstGeom prst="rect">
@@ -4811,11 +4457,10 @@
           <a:bodyPr vert="horz" lIns="91440" tIns="45720" rIns="91440" bIns="45720" rtlCol="0" anchor="ctr"/>
           <a:lstStyle>
             <a:lvl1pPr algn="l">
-              <a:defRPr sz="3310">
+              <a:defRPr sz="3972">
                 <a:solidFill>
                   <a:schemeClr val="tx1">
-                    <a:lumMod val="50000"/>
-                    <a:lumOff val="50000"/>
+                    <a:tint val="75000"/>
                   </a:schemeClr>
                 </a:solidFill>
               </a:defRPr>
@@ -4842,8 +4487,8 @@
         </p:nvSpPr>
         <p:spPr>
           <a:xfrm>
-            <a:off x="9605659" y="39663928"/>
-            <a:ext cx="14675650" cy="2278397"/>
+            <a:off x="10026035" y="39663928"/>
+            <a:ext cx="10215205" cy="2278397"/>
           </a:xfrm>
           <a:prstGeom prst="rect">
             <a:avLst/>
@@ -4852,12 +4497,11 @@
         <p:txBody>
           <a:bodyPr vert="horz" lIns="91440" tIns="45720" rIns="91440" bIns="45720" rtlCol="0" anchor="ctr"/>
           <a:lstStyle>
-            <a:lvl1pPr algn="l">
-              <a:defRPr sz="3310">
+            <a:lvl1pPr algn="ctr">
+              <a:defRPr sz="3972">
                 <a:solidFill>
                   <a:schemeClr val="tx1">
-                    <a:lumMod val="50000"/>
-                    <a:lumOff val="50000"/>
+                    <a:tint val="75000"/>
                   </a:schemeClr>
                 </a:solidFill>
               </a:defRPr>
@@ -4880,8 +4524,8 @@
         </p:nvSpPr>
         <p:spPr>
           <a:xfrm>
-            <a:off x="26399798" y="39663928"/>
-            <a:ext cx="3800605" cy="2278397"/>
+            <a:off x="21376263" y="39663928"/>
+            <a:ext cx="6810137" cy="2278397"/>
           </a:xfrm>
           <a:prstGeom prst="rect">
             <a:avLst/>
@@ -4891,9 +4535,11 @@
           <a:bodyPr vert="horz" lIns="91440" tIns="45720" rIns="91440" bIns="45720" rtlCol="0" anchor="ctr"/>
           <a:lstStyle>
             <a:lvl1pPr algn="r">
-              <a:defRPr sz="3641" b="1">
-                <a:solidFill>
-                  <a:schemeClr val="accent1"/>
+              <a:defRPr sz="3972">
+                <a:solidFill>
+                  <a:schemeClr val="tx1">
+                    <a:tint val="75000"/>
+                  </a:schemeClr>
                 </a:solidFill>
               </a:defRPr>
             </a:lvl1pPr>
@@ -4910,24 +4556,24 @@
     </p:spTree>
     <p:extLst>
       <p:ext uri="{BB962C8B-B14F-4D97-AF65-F5344CB8AC3E}">
-        <p14:creationId xmlns:p14="http://schemas.microsoft.com/office/powerpoint/2010/main" val="988498948"/>
+        <p14:creationId xmlns:p14="http://schemas.microsoft.com/office/powerpoint/2010/main" val="199480981"/>
       </p:ext>
     </p:extLst>
   </p:cSld>
   <p:clrMap bg1="lt1" tx1="dk1" bg2="lt2" tx2="dk2" accent1="accent1" accent2="accent2" accent3="accent3" accent4="accent4" accent5="accent5" accent6="accent6" hlink="hlink" folHlink="folHlink"/>
   <p:sldLayoutIdLst>
-    <p:sldLayoutId id="2147483738" r:id="rId1"/>
-    <p:sldLayoutId id="2147483739" r:id="rId2"/>
-    <p:sldLayoutId id="2147483740" r:id="rId3"/>
-    <p:sldLayoutId id="2147483741" r:id="rId4"/>
-    <p:sldLayoutId id="2147483742" r:id="rId5"/>
-    <p:sldLayoutId id="2147483743" r:id="rId6"/>
-    <p:sldLayoutId id="2147483744" r:id="rId7"/>
-    <p:sldLayoutId id="2147483745" r:id="rId8"/>
-    <p:sldLayoutId id="2147483746" r:id="rId9"/>
-    <p:sldLayoutId id="2147483747" r:id="rId10"/>
-    <p:sldLayoutId id="2147483748" r:id="rId11"/>
-    <p:sldLayoutId id="2147483749" r:id="rId12"/>
+    <p:sldLayoutId id="2147483764" r:id="rId1"/>
+    <p:sldLayoutId id="2147483765" r:id="rId2"/>
+    <p:sldLayoutId id="2147483766" r:id="rId3"/>
+    <p:sldLayoutId id="2147483767" r:id="rId4"/>
+    <p:sldLayoutId id="2147483768" r:id="rId5"/>
+    <p:sldLayoutId id="2147483769" r:id="rId6"/>
+    <p:sldLayoutId id="2147483770" r:id="rId7"/>
+    <p:sldLayoutId id="2147483771" r:id="rId8"/>
+    <p:sldLayoutId id="2147483772" r:id="rId9"/>
+    <p:sldLayoutId id="2147483773" r:id="rId10"/>
+    <p:sldLayoutId id="2147483774" r:id="rId11"/>
+    <p:sldLayoutId id="2147483775" r:id="rId12"/>
   </p:sldLayoutIdLst>
   <p:txStyles>
     <p:titleStyle>
@@ -4939,9 +4585,9 @@
           <a:spcPct val="0"/>
         </a:spcBef>
         <a:buNone/>
-        <a:defRPr sz="9930" kern="1200" spc="-199" baseline="0">
+        <a:defRPr sz="14564" kern="1200">
           <a:solidFill>
-            <a:srgbClr val="FFFFFF"/>
+            <a:schemeClr val="tx1"/>
           </a:solidFill>
           <a:latin typeface="+mj-lt"/>
           <a:ea typeface="+mj-ea"/>
@@ -4950,132 +4596,90 @@
       </a:lvl1pPr>
     </p:titleStyle>
     <p:bodyStyle>
-      <a:lvl1pPr marL="605351" indent="-605351" algn="l" defTabSz="3026755" rtl="0" eaLnBrk="1" latinLnBrk="0" hangingPunct="1">
+      <a:lvl1pPr marL="756689" indent="-756689" algn="l" defTabSz="3026755" rtl="0" eaLnBrk="1" latinLnBrk="0" hangingPunct="1">
         <a:lnSpc>
           <a:spcPct val="90000"/>
         </a:lnSpc>
         <a:spcBef>
-          <a:spcPts val="3972"/>
+          <a:spcPts val="3310"/>
         </a:spcBef>
-        <a:buClr>
-          <a:schemeClr val="accent1"/>
-        </a:buClr>
-        <a:buFont typeface="Wingdings 2" pitchFamily="18" charset="2"/>
-        <a:buChar char=""/>
-        <a:defRPr sz="6289" kern="1200">
+        <a:buFont typeface="Arial" panose="020B0604020202020204" pitchFamily="34" charset="0"/>
+        <a:buChar char="•"/>
+        <a:defRPr sz="9268" kern="1200">
           <a:solidFill>
-            <a:schemeClr val="tx1">
-              <a:lumMod val="65000"/>
-              <a:lumOff val="35000"/>
-            </a:schemeClr>
+            <a:schemeClr val="tx1"/>
           </a:solidFill>
           <a:latin typeface="+mn-lt"/>
           <a:ea typeface="+mn-ea"/>
           <a:cs typeface="+mn-cs"/>
         </a:defRPr>
       </a:lvl1pPr>
-      <a:lvl2pPr marL="2270067" indent="-605351" algn="l" defTabSz="3026755" rtl="0" eaLnBrk="1" latinLnBrk="0" hangingPunct="1">
+      <a:lvl2pPr marL="2270067" indent="-756689" algn="l" defTabSz="3026755" rtl="0" eaLnBrk="1" latinLnBrk="0" hangingPunct="1">
         <a:lnSpc>
           <a:spcPct val="90000"/>
         </a:lnSpc>
         <a:spcBef>
-          <a:spcPts val="828"/>
+          <a:spcPts val="1655"/>
         </a:spcBef>
-        <a:spcAft>
-          <a:spcPts val="828"/>
-        </a:spcAft>
-        <a:buClr>
-          <a:schemeClr val="accent1"/>
-        </a:buClr>
-        <a:buFont typeface="Wingdings 2" pitchFamily="18" charset="2"/>
-        <a:buChar char=""/>
-        <a:defRPr sz="5627" kern="1200">
+        <a:buFont typeface="Arial" panose="020B0604020202020204" pitchFamily="34" charset="0"/>
+        <a:buChar char="•"/>
+        <a:defRPr sz="7944" kern="1200">
           <a:solidFill>
-            <a:schemeClr val="tx1">
-              <a:lumMod val="65000"/>
-              <a:lumOff val="35000"/>
-            </a:schemeClr>
+            <a:schemeClr val="tx1"/>
           </a:solidFill>
           <a:latin typeface="+mn-lt"/>
           <a:ea typeface="+mn-ea"/>
           <a:cs typeface="+mn-cs"/>
         </a:defRPr>
       </a:lvl2pPr>
-      <a:lvl3pPr marL="3783444" indent="-605351" algn="l" defTabSz="3026755" rtl="0" eaLnBrk="1" latinLnBrk="0" hangingPunct="1">
+      <a:lvl3pPr marL="3783444" indent="-756689" algn="l" defTabSz="3026755" rtl="0" eaLnBrk="1" latinLnBrk="0" hangingPunct="1">
         <a:lnSpc>
           <a:spcPct val="90000"/>
         </a:lnSpc>
         <a:spcBef>
-          <a:spcPts val="828"/>
+          <a:spcPts val="1655"/>
         </a:spcBef>
-        <a:spcAft>
-          <a:spcPts val="828"/>
-        </a:spcAft>
-        <a:buClr>
-          <a:schemeClr val="accent1"/>
-        </a:buClr>
-        <a:buFont typeface="Wingdings 2" pitchFamily="18" charset="2"/>
-        <a:buChar char=""/>
-        <a:defRPr sz="4965" kern="1200">
+        <a:buFont typeface="Arial" panose="020B0604020202020204" pitchFamily="34" charset="0"/>
+        <a:buChar char="•"/>
+        <a:defRPr sz="6620" kern="1200">
           <a:solidFill>
-            <a:schemeClr val="tx1">
-              <a:lumMod val="65000"/>
-              <a:lumOff val="35000"/>
-            </a:schemeClr>
+            <a:schemeClr val="tx1"/>
           </a:solidFill>
           <a:latin typeface="+mn-lt"/>
           <a:ea typeface="+mn-ea"/>
           <a:cs typeface="+mn-cs"/>
         </a:defRPr>
       </a:lvl3pPr>
-      <a:lvl4pPr marL="5296822" indent="-605351" algn="l" defTabSz="3026755" rtl="0" eaLnBrk="1" latinLnBrk="0" hangingPunct="1">
+      <a:lvl4pPr marL="5296822" indent="-756689" algn="l" defTabSz="3026755" rtl="0" eaLnBrk="1" latinLnBrk="0" hangingPunct="1">
         <a:lnSpc>
           <a:spcPct val="90000"/>
         </a:lnSpc>
         <a:spcBef>
-          <a:spcPts val="828"/>
+          <a:spcPts val="1655"/>
         </a:spcBef>
-        <a:spcAft>
-          <a:spcPts val="828"/>
-        </a:spcAft>
-        <a:buClr>
-          <a:schemeClr val="accent1"/>
-        </a:buClr>
-        <a:buFont typeface="Wingdings 2" pitchFamily="18" charset="2"/>
-        <a:buChar char=""/>
-        <a:defRPr sz="4303" kern="1200">
+        <a:buFont typeface="Arial" panose="020B0604020202020204" pitchFamily="34" charset="0"/>
+        <a:buChar char="•"/>
+        <a:defRPr sz="5958" kern="1200">
           <a:solidFill>
-            <a:schemeClr val="tx1">
-              <a:lumMod val="65000"/>
-              <a:lumOff val="35000"/>
-            </a:schemeClr>
+            <a:schemeClr val="tx1"/>
           </a:solidFill>
           <a:latin typeface="+mn-lt"/>
           <a:ea typeface="+mn-ea"/>
           <a:cs typeface="+mn-cs"/>
         </a:defRPr>
       </a:lvl4pPr>
-      <a:lvl5pPr marL="6810200" indent="-605351" algn="l" defTabSz="3026755" rtl="0" eaLnBrk="1" latinLnBrk="0" hangingPunct="1">
+      <a:lvl5pPr marL="6810200" indent="-756689" algn="l" defTabSz="3026755" rtl="0" eaLnBrk="1" latinLnBrk="0" hangingPunct="1">
         <a:lnSpc>
           <a:spcPct val="90000"/>
         </a:lnSpc>
         <a:spcBef>
-          <a:spcPts val="828"/>
+          <a:spcPts val="1655"/>
         </a:spcBef>
-        <a:spcAft>
-          <a:spcPts val="828"/>
-        </a:spcAft>
-        <a:buClr>
-          <a:schemeClr val="accent1"/>
-        </a:buClr>
-        <a:buFont typeface="Wingdings 2" pitchFamily="18" charset="2"/>
-        <a:buChar char=""/>
-        <a:defRPr sz="4303" kern="1200">
+        <a:buFont typeface="Arial" panose="020B0604020202020204" pitchFamily="34" charset="0"/>
+        <a:buChar char="•"/>
+        <a:defRPr sz="5958" kern="1200">
           <a:solidFill>
-            <a:schemeClr val="tx1">
-              <a:lumMod val="65000"/>
-              <a:lumOff val="35000"/>
-            </a:schemeClr>
+            <a:schemeClr val="tx1"/>
           </a:solidFill>
           <a:latin typeface="+mn-lt"/>
           <a:ea typeface="+mn-ea"/>
@@ -5087,22 +4691,13 @@
           <a:spcPct val="90000"/>
         </a:lnSpc>
         <a:spcBef>
-          <a:spcPts val="828"/>
+          <a:spcPts val="1655"/>
         </a:spcBef>
-        <a:spcAft>
-          <a:spcPts val="828"/>
-        </a:spcAft>
-        <a:buClr>
-          <a:schemeClr val="accent1"/>
-        </a:buClr>
-        <a:buFont typeface="Wingdings 2" pitchFamily="18" charset="2"/>
-        <a:buChar char=""/>
-        <a:defRPr sz="4303" kern="1200">
+        <a:buFont typeface="Arial" panose="020B0604020202020204" pitchFamily="34" charset="0"/>
+        <a:buChar char="•"/>
+        <a:defRPr sz="5958" kern="1200">
           <a:solidFill>
-            <a:schemeClr val="tx1">
-              <a:lumMod val="65000"/>
-              <a:lumOff val="35000"/>
-            </a:schemeClr>
+            <a:schemeClr val="tx1"/>
           </a:solidFill>
           <a:latin typeface="+mn-lt"/>
           <a:ea typeface="+mn-ea"/>
@@ -5114,22 +4709,13 @@
           <a:spcPct val="90000"/>
         </a:lnSpc>
         <a:spcBef>
-          <a:spcPts val="828"/>
+          <a:spcPts val="1655"/>
         </a:spcBef>
-        <a:spcAft>
-          <a:spcPts val="828"/>
-        </a:spcAft>
-        <a:buClr>
-          <a:schemeClr val="accent1"/>
-        </a:buClr>
-        <a:buFont typeface="Wingdings 2" pitchFamily="18" charset="2"/>
-        <a:buChar char=""/>
-        <a:defRPr sz="4303" kern="1200">
+        <a:buFont typeface="Arial" panose="020B0604020202020204" pitchFamily="34" charset="0"/>
+        <a:buChar char="•"/>
+        <a:defRPr sz="5958" kern="1200">
           <a:solidFill>
-            <a:schemeClr val="tx1">
-              <a:lumMod val="65000"/>
-              <a:lumOff val="35000"/>
-            </a:schemeClr>
+            <a:schemeClr val="tx1"/>
           </a:solidFill>
           <a:latin typeface="+mn-lt"/>
           <a:ea typeface="+mn-ea"/>
@@ -5141,22 +4727,13 @@
           <a:spcPct val="90000"/>
         </a:lnSpc>
         <a:spcBef>
-          <a:spcPts val="828"/>
+          <a:spcPts val="1655"/>
         </a:spcBef>
-        <a:spcAft>
-          <a:spcPts val="828"/>
-        </a:spcAft>
-        <a:buClr>
-          <a:schemeClr val="accent1"/>
-        </a:buClr>
-        <a:buFont typeface="Wingdings 2" pitchFamily="18" charset="2"/>
-        <a:buChar char=""/>
-        <a:defRPr sz="4303" kern="1200">
+        <a:buFont typeface="Arial" panose="020B0604020202020204" pitchFamily="34" charset="0"/>
+        <a:buChar char="•"/>
+        <a:defRPr sz="5958" kern="1200">
           <a:solidFill>
-            <a:schemeClr val="tx1">
-              <a:lumMod val="65000"/>
-              <a:lumOff val="35000"/>
-            </a:schemeClr>
+            <a:schemeClr val="tx1"/>
           </a:solidFill>
           <a:latin typeface="+mn-lt"/>
           <a:ea typeface="+mn-ea"/>
@@ -5168,22 +4745,13 @@
           <a:spcPct val="90000"/>
         </a:lnSpc>
         <a:spcBef>
-          <a:spcPts val="828"/>
+          <a:spcPts val="1655"/>
         </a:spcBef>
-        <a:spcAft>
-          <a:spcPts val="828"/>
-        </a:spcAft>
-        <a:buClr>
-          <a:schemeClr val="accent1"/>
-        </a:buClr>
-        <a:buFont typeface="Wingdings 2" pitchFamily="18" charset="2"/>
-        <a:buChar char=""/>
-        <a:defRPr sz="4303" kern="1200">
+        <a:buFont typeface="Arial" panose="020B0604020202020204" pitchFamily="34" charset="0"/>
+        <a:buChar char="•"/>
+        <a:defRPr sz="5958" kern="1200">
           <a:solidFill>
-            <a:schemeClr val="tx1">
-              <a:lumMod val="65000"/>
-              <a:lumOff val="35000"/>
-            </a:schemeClr>
+            <a:schemeClr val="tx1"/>
           </a:solidFill>
           <a:latin typeface="+mn-lt"/>
           <a:ea typeface="+mn-ea"/>
@@ -5317,8 +4885,8 @@
         </p:nvSpPr>
         <p:spPr bwMode="auto">
           <a:xfrm>
-            <a:off x="3997289" y="2204332"/>
-            <a:ext cx="21117102" cy="4263735"/>
+            <a:off x="4715600" y="959856"/>
+            <a:ext cx="21117102" cy="5310176"/>
           </a:xfrm>
           <a:prstGeom prst="rect">
             <a:avLst/>
@@ -5460,30 +5028,29 @@
             </a:lvl9pPr>
           </a:lstStyle>
           <a:p>
-            <a:pPr algn="ctr" eaLnBrk="1" hangingPunct="1"/>
-            <a:r>
-              <a:rPr lang="en-US" sz="7200" b="1" noProof="1">
+            <a:pPr algn="ctr"/>
+            <a:r>
+              <a:rPr lang="en-US" sz="7200" noProof="1">
                 <a:solidFill>
                   <a:schemeClr val="bg1"/>
                 </a:solidFill>
               </a:rPr>
-              <a:t>Stabilizer Video Monoculară în Timp Aproape Real cu ORB + Homografie și Netezire Adaptivă</a:t>
-            </a:r>
-            <a:endParaRPr lang="en-US" sz="7200" noProof="1">
+              <a:t>Stabilizare Video Monoculară cu Estimare Afină a Mișcării (Python + OpenCV)</a:t>
+            </a:r>
+          </a:p>
+          <a:p>
+            <a:pPr algn="ctr"/>
+            <a:br>
+              <a:rPr lang="en-US" sz="7200" noProof="1">
+                <a:solidFill>
+                  <a:schemeClr val="bg1"/>
+                </a:solidFill>
+              </a:rPr>
+            </a:br>
+            <a:endParaRPr lang="en-US" sz="7200" b="1" noProof="1">
               <a:solidFill>
                 <a:schemeClr val="bg1"/>
               </a:solidFill>
-            </a:endParaRPr>
-          </a:p>
-          <a:p>
-            <a:pPr algn="ctr" eaLnBrk="1" hangingPunct="1"/>
-            <a:endParaRPr lang="en-US" sz="7600" b="1" noProof="1">
-              <a:solidFill>
-                <a:schemeClr val="accent3">
-                  <a:lumMod val="20000"/>
-                  <a:lumOff val="80000"/>
-                </a:schemeClr>
-              </a:solidFill>
               <a:latin typeface="+mn-lt"/>
             </a:endParaRPr>
           </a:p>
@@ -5497,8 +5064,8 @@
         </p:nvSpPr>
         <p:spPr>
           <a:xfrm>
-            <a:off x="1261136" y="39049741"/>
-            <a:ext cx="5500430" cy="1934479"/>
+            <a:off x="1261136" y="39049740"/>
+            <a:ext cx="6785901" cy="2857808"/>
           </a:xfrm>
           <a:prstGeom prst="rect">
             <a:avLst/>
@@ -5511,32 +5078,38 @@
           </a:solidFill>
         </p:spPr>
         <p:txBody>
-          <a:bodyPr wrap="none" lIns="86970" tIns="43485" rIns="86970" bIns="43485" rtlCol="0">
+          <a:bodyPr wrap="square" lIns="86970" tIns="43485" rIns="86970" bIns="43485" rtlCol="0">
             <a:spAutoFit/>
           </a:bodyPr>
           <a:lstStyle/>
           <a:p>
             <a:r>
-              <a:rPr lang="en-US" sz="3000" noProof="1"/>
+              <a:rPr lang="en-US" sz="3600" noProof="1"/>
               <a:t>CIOBANU CONSTANTIN-MARCU</a:t>
             </a:r>
           </a:p>
           <a:p>
             <a:r>
-              <a:rPr lang="en-US" sz="3000" noProof="1"/>
+              <a:rPr lang="en-US" sz="3600" noProof="1"/>
               <a:t>BUTCO DUMITRU-CONSTANTIN</a:t>
             </a:r>
           </a:p>
           <a:p>
             <a:r>
-              <a:rPr lang="en-US" sz="3000" noProof="1"/>
-              <a:t>Prod Indr.</a:t>
-            </a:r>
-          </a:p>
-          <a:p>
-            <a:r>
-              <a:rPr lang="en-US" sz="3000" noProof="1"/>
-              <a:t>Pula mea in Gura ei ?</a:t>
+              <a:rPr lang="en-US" sz="3600" noProof="1"/>
+              <a:t>Prod Indr. </a:t>
+            </a:r>
+          </a:p>
+          <a:p>
+            <a:r>
+              <a:rPr lang="en-US" sz="3600" noProof="1"/>
+              <a:t>Ș.l. Otilia Zvorișteanu</a:t>
+            </a:r>
+          </a:p>
+          <a:p>
+            <a:r>
+              <a:rPr lang="en-US" sz="3600" noProof="1"/>
+              <a:t>Ș.l. Ștefan Achirei</a:t>
             </a:r>
           </a:p>
         </p:txBody>
@@ -5549,7 +5122,7 @@
         </p:nvSpPr>
         <p:spPr>
           <a:xfrm>
-            <a:off x="15133638" y="39049741"/>
+            <a:off x="15128874" y="39509148"/>
             <a:ext cx="13452122" cy="2852949"/>
           </a:xfrm>
           <a:prstGeom prst="rect">
@@ -5564,120 +5137,45 @@
           <a:lstStyle/>
           <a:p>
             <a:r>
-              <a:rPr lang="en-US" b="1" dirty="0" err="1"/>
-              <a:t>Referințe</a:t>
-            </a:r>
-            <a:r>
-              <a:rPr lang="en-US" b="1" dirty="0"/>
-              <a:t> (</a:t>
-            </a:r>
-            <a:r>
-              <a:rPr lang="en-US" b="1" dirty="0" err="1"/>
-              <a:t>selectiv</a:t>
-            </a:r>
-            <a:r>
-              <a:rPr lang="en-US" b="1" dirty="0"/>
-              <a:t>, </a:t>
-            </a:r>
-            <a:r>
-              <a:rPr lang="en-US" b="1" dirty="0" err="1"/>
-              <a:t>în</a:t>
-            </a:r>
-            <a:r>
-              <a:rPr lang="en-US" b="1" dirty="0"/>
-              <a:t> format </a:t>
-            </a:r>
-            <a:r>
-              <a:rPr lang="en-US" b="1" dirty="0" err="1"/>
-              <a:t>scurt</a:t>
-            </a:r>
-            <a:r>
-              <a:rPr lang="en-US" b="1" dirty="0"/>
-              <a:t>):</a:t>
-            </a:r>
-            <a:endParaRPr lang="en-US" dirty="0"/>
-          </a:p>
-          <a:p>
-            <a:r>
-              <a:rPr lang="en-US" b="1" dirty="0"/>
-              <a:t>[1] OpenCV Documentation – Feature Detection &amp; Description.</a:t>
-            </a:r>
-            <a:endParaRPr lang="en-US" dirty="0"/>
-          </a:p>
-          <a:p>
-            <a:r>
-              <a:rPr lang="en-US" b="1" dirty="0"/>
-              <a:t>[2] Rublee et al., ORB: An Efficient Alternative to SIFT or SURF, ICCV 2011.</a:t>
-            </a:r>
-            <a:endParaRPr lang="en-US" dirty="0"/>
-          </a:p>
-          <a:p>
-            <a:r>
-              <a:rPr lang="en-US" b="1" dirty="0"/>
-              <a:t>[3] Lowe, Distinctive Image Features from Scale-Invariant </a:t>
-            </a:r>
-            <a:r>
-              <a:rPr lang="en-US" b="1" dirty="0" err="1"/>
-              <a:t>Keypoints</a:t>
-            </a:r>
-            <a:r>
-              <a:rPr lang="en-US" b="1" dirty="0"/>
-              <a:t>, IJCV 2004.</a:t>
-            </a:r>
-            <a:endParaRPr lang="en-US" dirty="0"/>
-          </a:p>
-          <a:p>
-            <a:r>
-              <a:rPr lang="en-US" b="1" dirty="0"/>
-              <a:t>[4] Fischler &amp; Bolles, Random Sample Consensus (RANSAC), CACM 1981.</a:t>
-            </a:r>
-            <a:endParaRPr lang="en-US" dirty="0"/>
-          </a:p>
-          <a:p>
-            <a:r>
-              <a:rPr lang="en-US" b="1" dirty="0"/>
-              <a:t>[5] Nghia Ho – Tutorial </a:t>
-            </a:r>
-            <a:r>
-              <a:rPr lang="en-US" b="1" dirty="0" err="1"/>
-              <a:t>stabilizare</a:t>
-            </a:r>
-            <a:r>
-              <a:rPr lang="en-US" b="1" dirty="0"/>
-              <a:t> video (concept de </a:t>
-            </a:r>
-            <a:r>
-              <a:rPr lang="en-US" b="1" dirty="0" err="1"/>
-              <a:t>traiectorie</a:t>
-            </a:r>
-            <a:r>
-              <a:rPr lang="en-US" b="1" dirty="0"/>
-              <a:t> + smoothing).</a:t>
-            </a:r>
-            <a:endParaRPr lang="en-US" dirty="0"/>
-          </a:p>
-          <a:p>
-            <a:r>
-              <a:rPr lang="en-US" b="1" dirty="0"/>
-              <a:t>[6] Lucas &amp; Kanade, Iterative Image Registration Technique, 1981 (</a:t>
-            </a:r>
-            <a:r>
-              <a:rPr lang="en-US" b="1" dirty="0" err="1"/>
-              <a:t>pentru</a:t>
-            </a:r>
-            <a:r>
-              <a:rPr lang="en-US" b="1" dirty="0"/>
-              <a:t> </a:t>
-            </a:r>
-            <a:r>
-              <a:rPr lang="en-US" b="1" dirty="0" err="1"/>
-              <a:t>comparație</a:t>
-            </a:r>
-            <a:r>
-              <a:rPr lang="en-US" b="1" dirty="0"/>
-              <a:t>).</a:t>
-            </a:r>
-            <a:endParaRPr lang="en-US" dirty="0"/>
+              <a:rPr lang="en-US" sz="2800" dirty="0"/>
+              <a:t>[1] Shi &amp; Tomasi, Good Features to Track, 1994.</a:t>
+            </a:r>
+            <a:br>
+              <a:rPr lang="en-US" sz="2800" dirty="0"/>
+            </a:br>
+            <a:r>
+              <a:rPr lang="en-US" sz="2800" dirty="0"/>
+              <a:t>[2] Lucas &amp; Kanade, Image Registration, 1981.</a:t>
+            </a:r>
+            <a:br>
+              <a:rPr lang="en-US" sz="2800" dirty="0"/>
+            </a:br>
+            <a:r>
+              <a:rPr lang="en-US" sz="2800" dirty="0"/>
+              <a:t>[3] Fischler &amp; Bolles, RANSAC, 1981.</a:t>
+            </a:r>
+            <a:br>
+              <a:rPr lang="en-US" sz="2800" dirty="0"/>
+            </a:br>
+            <a:r>
+              <a:rPr lang="en-US" sz="2800" dirty="0"/>
+              <a:t>[4] OpenCV Documentation (Video Stabilization &amp; Features).</a:t>
+            </a:r>
+            <a:br>
+              <a:rPr lang="en-US" sz="2800" dirty="0"/>
+            </a:br>
+            <a:r>
+              <a:rPr lang="en-US" sz="2800" dirty="0"/>
+              <a:t>[5] Nghia Ho – Tutorial Video Stabilization (concept trajectory smoothing).</a:t>
+            </a:r>
+            <a:br>
+              <a:rPr lang="en-US" sz="2800" dirty="0"/>
+            </a:br>
+            <a:r>
+              <a:rPr lang="en-US" sz="2800" dirty="0"/>
+              <a:t>[6] Rublee et al., ORB, ICCV 2011 </a:t>
+            </a:r>
+            <a:endParaRPr lang="en-US" sz="2800" noProof="1"/>
           </a:p>
         </p:txBody>
       </p:sp>
@@ -5689,8 +5187,8 @@
         </p:nvSpPr>
         <p:spPr>
           <a:xfrm>
-            <a:off x="15133638" y="37890733"/>
-            <a:ext cx="3325668" cy="918816"/>
+            <a:off x="15157978" y="38727272"/>
+            <a:ext cx="3452498" cy="918816"/>
           </a:xfrm>
           <a:prstGeom prst="rect">
             <a:avLst/>
@@ -5705,7 +5203,7 @@
           <a:p>
             <a:r>
               <a:rPr lang="en-US" sz="5400" b="1" noProof="1"/>
-              <a:t>References</a:t>
+              <a:t>Bibliografie</a:t>
             </a:r>
           </a:p>
         </p:txBody>
@@ -5720,8 +5218,8 @@
         </p:nvSpPr>
         <p:spPr bwMode="auto">
           <a:xfrm>
-            <a:off x="1681515" y="7132373"/>
-            <a:ext cx="8407576" cy="9215242"/>
+            <a:off x="1111510" y="6535981"/>
+            <a:ext cx="8407576" cy="9769240"/>
           </a:xfrm>
           <a:prstGeom prst="rect">
             <a:avLst/>
@@ -5854,7 +5352,7 @@
           <a:p>
             <a:r>
               <a:rPr lang="en-US" sz="3600" noProof="1"/>
-              <a:t>Proiectul prezintă un pipeline ușor de integrat pentru stabilizarea globală a videoclipurilor monoculare. Sistemul folosește detecția de caracteristici ORB, potrivire cu test de raport, estimare robustă a homografiei (RANSAC) și netezire temporală Gaussiană a traiectoriei (translație + rotație). Implementare backend (Flask + OpenCV) expusă printr‑un endpoint REST și interfață web care oferă parametri ajustabili (fereastră de netezire, crop, overlay, side‑by‑side). Rezultatul: reducerea tremuratului de cameră fără pierdere severă de detaliu și cu distorsiuni minime la margini.</a:t>
+              <a:t>Scop: reducerea tremuratului (jitter) din filmări monoculare handheld prin estimarea și filtrarea traiectoriei camerei. Metodă: detectare colțuri (Shi–Tomasi), urmărire optică (Lucas–Kanade piramidal), estimare transform afină cu RANSAC, netezire (medie mobilă) a traiectoriei cumulative și aplicare transform invers pentru compensare. Implementare: backend Flask + OpenCV, interfață web (upload, parametri window/crop/overlay/side‑by‑side). Rezultat: scădere a variației frame‑to‑frame a deplasărilor cu o medie de 30% și îmbunătățire vizuală fără distorsiuni majore.</a:t>
             </a:r>
           </a:p>
         </p:txBody>
@@ -5867,7 +5365,7 @@
         </p:nvSpPr>
         <p:spPr>
           <a:xfrm>
-            <a:off x="1681515" y="6240826"/>
+            <a:off x="1111510" y="5596825"/>
             <a:ext cx="8407576" cy="891547"/>
           </a:xfrm>
           <a:prstGeom prst="rect">
@@ -5924,8 +5422,8 @@
         </p:nvSpPr>
         <p:spPr bwMode="auto">
           <a:xfrm>
-            <a:off x="10921092" y="21397119"/>
-            <a:ext cx="8407576" cy="12539229"/>
+            <a:off x="10656121" y="19820429"/>
+            <a:ext cx="8407576" cy="11431234"/>
           </a:xfrm>
           <a:prstGeom prst="rect">
             <a:avLst/>
@@ -6071,49 +5569,64 @@
           <a:p>
             <a:r>
               <a:rPr lang="en-US" sz="3600" noProof="1"/>
-              <a:t>- Timp procesare: ~X fps (completați după măsurare) la scale=0.5 pe rezoluție 1280×720.</a:t>
+              <a:t>Procesare: 44.08 fps (mai rapid decât timpul real)</a:t>
             </a:r>
           </a:p>
           <a:p>
             <a:r>
               <a:rPr lang="en-US" sz="3600" noProof="1"/>
-              <a:t>- Număr mediu potriviri valide: ~N (completați).</a:t>
+              <a:t>Parametri: fereastră netezire 10 | crop 4% | overlay: da | side-by-side: da | scale: 0.5</a:t>
             </a:r>
           </a:p>
           <a:p>
             <a:r>
               <a:rPr lang="en-US" sz="3600" noProof="1"/>
-              <a:t>- Variabilitate rotație înainte vs după (σθ redusă cu ~Y%). (completați după calcul)</a:t>
+              <a:t>Trăsături detectate (medie): 221 / cadru</a:t>
             </a:r>
           </a:p>
           <a:p>
             <a:r>
               <a:rPr lang="en-US" sz="3600" noProof="1"/>
-              <a:t>Figuri sugerate:</a:t>
+              <a:t>Inliers (medie): 200 (≈90.6% din trăsături)</a:t>
             </a:r>
           </a:p>
           <a:p>
             <a:r>
               <a:rPr lang="en-US" sz="3600" noProof="1"/>
-              <a:t>A. Cadru original vs stabilizat (side‑by‑side).</a:t>
+              <a:t>Cadre fallback: 7.7%</a:t>
             </a:r>
           </a:p>
           <a:p>
             <a:r>
               <a:rPr lang="en-US" sz="3600" noProof="1"/>
-              <a:t>B. Grafic traiectorie brută vs netezită (dx, dy).</a:t>
-            </a:r>
-          </a:p>
-          <a:p>
+              <a:t>Reducere jitter (std incrementale):</a:t>
+            </a:r>
+          </a:p>
+          <a:p>
+            <a:pPr lvl="1"/>
             <a:r>
               <a:rPr lang="en-US" sz="3600" noProof="1"/>
-              <a:t>C. Histogramă distribuție lungimi potriviri / inliers.</a:t>
-            </a:r>
-          </a:p>
-          <a:p>
+              <a:t>Transl. X: 25.86 → 17.74 px (−31%)</a:t>
+            </a:r>
+          </a:p>
+          <a:p>
+            <a:pPr lvl="1"/>
             <a:r>
               <a:rPr lang="en-US" sz="3600" noProof="1"/>
-              <a:t>D. Mini‑map traiectorie cameră.</a:t>
+              <a:t>Transl. Y: 38.19 → 21.32 px (−44%)</a:t>
+            </a:r>
+          </a:p>
+          <a:p>
+            <a:pPr lvl="1"/>
+            <a:r>
+              <a:rPr lang="en-US" sz="3600" noProof="1"/>
+              <a:t>Rotație: 0.41° → 0.15° (−62%)</a:t>
+            </a:r>
+          </a:p>
+          <a:p>
+            <a:r>
+              <a:rPr lang="en-US" sz="3600" noProof="1"/>
+              <a:t>Observație: stabilizare reușită</a:t>
             </a:r>
           </a:p>
         </p:txBody>
@@ -6126,7 +5639,7 @@
         </p:nvSpPr>
         <p:spPr>
           <a:xfrm>
-            <a:off x="1681515" y="17855011"/>
+            <a:off x="1111510" y="17422243"/>
             <a:ext cx="8407576" cy="891547"/>
           </a:xfrm>
           <a:prstGeom prst="rect">
@@ -6183,8 +5696,8 @@
         </p:nvSpPr>
         <p:spPr bwMode="auto">
           <a:xfrm>
-            <a:off x="10929850" y="7132373"/>
-            <a:ext cx="8407576" cy="11985231"/>
+            <a:off x="10659390" y="6575675"/>
+            <a:ext cx="8407576" cy="11431234"/>
           </a:xfrm>
           <a:prstGeom prst="rect">
             <a:avLst/>
@@ -6312,67 +5825,62 @@
           <a:p>
             <a:r>
               <a:rPr lang="en-US" sz="3600" noProof="1"/>
-              <a:t>1. Import frame curent și precedent.</a:t>
+              <a:t>Pre-procesare: conversie la gri, opțional downscale (scale).</a:t>
             </a:r>
           </a:p>
           <a:p>
             <a:r>
               <a:rPr lang="en-US" sz="3600" noProof="1"/>
-              <a:t>2. ORB (nfeatures=500) → keypoints + descriptori.</a:t>
+              <a:t>Features: Shi–Tomasi (max 500 puncte, quality 0.01, minDist 20).</a:t>
             </a:r>
           </a:p>
           <a:p>
             <a:r>
               <a:rPr lang="en-US" sz="3600" noProof="1"/>
-              <a:t>3. Potrivire BF Hamming (knn k=2) + test Lowe (raport &lt; 0.75 default).</a:t>
+              <a:t>Tracking: Lucas–Kanade piramidal (niveluri 3, fereastră 21×21).</a:t>
             </a:r>
           </a:p>
           <a:p>
             <a:r>
               <a:rPr lang="en-US" sz="3600" noProof="1"/>
-              <a:t>4. Filtrare potriviri → coordonate (x,y).</a:t>
+              <a:t>Model: estimateAffinePartial2D + RANSAC (thresh 3 px, maxIters 100).</a:t>
             </a:r>
           </a:p>
           <a:p>
             <a:r>
               <a:rPr lang="en-US" sz="3600" noProof="1"/>
-              <a:t>5. Estimare Homografie H (RANSAC, thresh=5 px) → extragere dx, dy, θ.</a:t>
+              <a:t>Parametri extrași: dx, dy, da (rotație).</a:t>
             </a:r>
           </a:p>
           <a:p>
             <a:r>
               <a:rPr lang="en-US" sz="3600" noProof="1"/>
-              <a:t>6. Construire traiectorie cumulativă.</a:t>
+              <a:t>Traiectorie: acumulare sumă a incrementelor.</a:t>
             </a:r>
           </a:p>
           <a:p>
             <a:r>
               <a:rPr lang="en-US" sz="3600" noProof="1"/>
-              <a:t>7. Netezire Gaussiană (kernel adaptat la radius).</a:t>
+              <a:t>Smoothing: medie mobilă (fereastră = window).</a:t>
             </a:r>
           </a:p>
           <a:p>
             <a:r>
               <a:rPr lang="en-US" sz="3600" noProof="1"/>
-              <a:t>8. Calcul corecție = smoothed − raw → matrice compensare → warpAffine / warpPerspective (dacă se extinde).</a:t>
+              <a:t>Compensare: diff = smooth − raw → warpAffine + crop (crop%).</a:t>
             </a:r>
           </a:p>
           <a:p>
             <a:r>
               <a:rPr lang="en-US" sz="3600" noProof="1"/>
-              <a:t>9. Crop protectiv (4%) + redimensionare.</a:t>
-            </a:r>
-          </a:p>
-          <a:p>
-            <a:r>
+              <a:t>Output: cadru stabilizat (sau side‑by‑side), overlay opțional (features, mini‑path).</a:t>
+            </a:r>
+            <a:br>
               <a:rPr lang="en-US" sz="3600" noProof="1"/>
-              <a:t>10. Opțional: overlay (features, traiectorie mini‑map), output side‑by‑side.</a:t>
-            </a:r>
-          </a:p>
-          <a:p>
+            </a:br>
             <a:r>
               <a:rPr lang="en-US" sz="3600" noProof="1"/>
-              <a:t>Stack: Python 3.12, OpenCV, Flask, React (frontend), MUI.</a:t>
+              <a:t>Stack: Python 3.12, OpenCV, Flask, React (MUI).</a:t>
             </a:r>
           </a:p>
         </p:txBody>
@@ -6385,7 +5893,7 @@
         </p:nvSpPr>
         <p:spPr>
           <a:xfrm>
-            <a:off x="10929850" y="6240826"/>
+            <a:off x="10564373" y="5596824"/>
             <a:ext cx="8407576" cy="891547"/>
           </a:xfrm>
           <a:prstGeom prst="rect">
@@ -6571,7 +6079,7 @@
           <a:p>
             <a:r>
               <a:rPr lang="en-US" sz="3600" noProof="1"/>
-              <a:t>Modelul pe bază de homografie gestionează efecte de perspectivă moderate mai bine decât un simplu affine. Limitări: parallax puternic (scene cu profunzime mare și obiecte apropiate), ocluzii rapide, motion blur sever → pierdere feature. Netezirea Gaussiană nu impune constrângeri dinamice (posibil overshoot). Posibile îmbunătățiri: filtrare Kalman / spline smoothing, segmentare plană (multi‑model), detectare frame outlier și keyframe locking, propagare mascată pe zone dinamice.</a:t>
+              <a:t>Avantaje: implementare simplă, rapidă, parametri intuitivi, diagnostic vizual integrat. Modelul afin parțial limitează artefactele de perspectivă față de homografie instabilă în scene cu parallax. Limitări: blur sever, puține texturi, obiect mare în prim-plan, rotații bruște, rolling shutter (necorectat). Smoothing rectangular poate introduce întârziere la schimbări reale de direcție. Posibilitate extindere: ORB + homografie adaptivă, filtru Kalman / Savitzky–Golay, detectare outlier frames, GPU acceleration.</a:t>
             </a:r>
           </a:p>
         </p:txBody>
@@ -6642,7 +6150,7 @@
         <p:spPr bwMode="auto">
           <a:xfrm>
             <a:off x="20178184" y="27637946"/>
-            <a:ext cx="8407576" cy="5337258"/>
+            <a:ext cx="8407576" cy="8107247"/>
           </a:xfrm>
           <a:prstGeom prst="rect">
             <a:avLst/>
@@ -6764,7 +6272,22 @@
           <a:p>
             <a:r>
               <a:rPr lang="en-US" sz="3600" noProof="1"/>
-              <a:t>Sistemul oferă stabilizare robustă cu cost computațional redus și parametri intuitivi. ORB + Homografie + netezire Gaussiană reprezintă un compromis bun între calitate și viteză. Platforma este extensibilă pentru filtre suplimentare (denoise temporal, sharpening adaptiv) și pentru exportul metadatelor de mișcare.</a:t>
+              <a:t>Pipeline-ul atinge obiectivul: reducere semnificativă a jitter-ului cu cost computațional moderat și fără deformări evidente. Structura modulară permite integrarea rapidă a unor modele mai complexe (homografie, multi‑plan). Exportul de statistici oferă trasabilitate și bază pentru monitorizarea calității. </a:t>
+            </a:r>
+          </a:p>
+          <a:p>
+            <a:endParaRPr lang="en-US" sz="3600" noProof="1"/>
+          </a:p>
+          <a:p>
+            <a:r>
+              <a:rPr lang="en-US" sz="3600" noProof="1"/>
+              <a:t>Direcții viitoare si imbunatatiri ulterioare</a:t>
+            </a:r>
+          </a:p>
+          <a:p>
+            <a:r>
+              <a:rPr lang="en-US" sz="3600" noProof="1"/>
+              <a:t>smoothing avansat, fallback dinamic affine/homography, optimizare performanță.</a:t>
             </a:r>
           </a:p>
         </p:txBody>
@@ -6834,8 +6357,8 @@
         </p:nvSpPr>
         <p:spPr bwMode="auto">
           <a:xfrm>
-            <a:off x="1711016" y="18730358"/>
-            <a:ext cx="8407576" cy="5891255"/>
+            <a:off x="1111510" y="18297679"/>
+            <a:ext cx="8407576" cy="7553249"/>
           </a:xfrm>
           <a:prstGeom prst="rect">
             <a:avLst/>
@@ -6963,8 +6486,14 @@
           <a:p>
             <a:r>
               <a:rPr lang="en-US" sz="3600" noProof="1"/>
-              <a:t>Problema: Filmări handheld / dash / phone conțin mișcare nedorită de frecvență joasă și jitter de frame. Stabilizarea software reduce oboseala vizuală și crește utilitatea analitică. Abordările clasice: block matching, flux optic dens, modele afine/homografii + filtrare traiectorie. Obiectiv: soluție cross‑platform, rapidă, configurabilă, ușor de extins.</a:t>
-            </a:r>
+              <a:t>Problema: filmările mobile au jitter de frecvență înaltă care degradează lizibilitatea și analiza ulterioară. Abordări clasice: hardware gimbal, senzori inerțiali, stabilizare software (model transform + smoothing). Obiectiv: soluție software pură, rapidă, configurabilă, cu diagnostic vizual și export de statistici. Contribuție: pipeline clar, parametri puțini, extensibil spre homografie/filtre avansate.</a:t>
+            </a:r>
+          </a:p>
+          <a:p>
+            <a:br>
+              <a:rPr lang="en-US" sz="3600" noProof="1"/>
+            </a:br>
+            <a:endParaRPr lang="en-US" sz="3600" noProof="1"/>
           </a:p>
         </p:txBody>
       </p:sp>
@@ -6976,7 +6505,7 @@
         </p:nvSpPr>
         <p:spPr>
           <a:xfrm>
-            <a:off x="10929850" y="20505572"/>
+            <a:off x="10659390" y="18738958"/>
             <a:ext cx="8407576" cy="891547"/>
           </a:xfrm>
           <a:prstGeom prst="rect">
@@ -7052,7 +6581,7 @@
         </p:blipFill>
         <p:spPr bwMode="auto">
           <a:xfrm>
-            <a:off x="213167" y="380485"/>
+            <a:off x="217620" y="1267940"/>
             <a:ext cx="4481796" cy="2521010"/>
           </a:xfrm>
           <a:prstGeom prst="rect">
@@ -7137,10 +6666,10 @@
       </p:pic>
       <p:pic>
         <p:nvPicPr>
-          <p:cNvPr id="17" name="Picture 16">
+          <p:cNvPr id="5" name="Picture 4">
             <a:extLst>
               <a:ext uri="{FF2B5EF4-FFF2-40B4-BE49-F238E27FC236}">
-                <a16:creationId xmlns:a16="http://schemas.microsoft.com/office/drawing/2014/main" id="{703810BC-7EC6-5509-B946-A970495AB057}"/>
+                <a16:creationId xmlns:a16="http://schemas.microsoft.com/office/drawing/2014/main" id="{3C156E43-BBA6-5CC9-B670-D6210788D8EA}"/>
               </a:ext>
             </a:extLst>
           </p:cNvPr>
@@ -7162,8 +6691,8 @@
         </p:blipFill>
         <p:spPr>
           <a:xfrm>
-            <a:off x="20104083" y="7795926"/>
-            <a:ext cx="8481676" cy="5621134"/>
+            <a:off x="19337426" y="5623719"/>
+            <a:ext cx="10099366" cy="10424120"/>
           </a:xfrm>
           <a:prstGeom prst="rect">
             <a:avLst/>
@@ -7184,58 +6713,93 @@
 </file>
 
 <file path=ppt/theme/theme1.xml><?xml version="1.0" encoding="utf-8"?>
-<a:theme xmlns:a="http://schemas.openxmlformats.org/drawingml/2006/main" name="Frame">
+<a:theme xmlns:a="http://schemas.openxmlformats.org/drawingml/2006/main" name="Office 2013 - 2022 Theme">
   <a:themeElements>
-    <a:clrScheme name="Frame">
+    <a:clrScheme name="Office 2013 - 2022 Theme">
       <a:dk1>
-        <a:srgbClr val="000000"/>
+        <a:sysClr val="windowText" lastClr="000000"/>
       </a:dk1>
       <a:lt1>
-        <a:srgbClr val="FFFFFF"/>
+        <a:sysClr val="window" lastClr="FFFFFF"/>
       </a:lt1>
       <a:dk2>
-        <a:srgbClr val="545454"/>
+        <a:srgbClr val="44546A"/>
       </a:dk2>
       <a:lt2>
-        <a:srgbClr val="BFBFBF"/>
+        <a:srgbClr val="E7E6E6"/>
       </a:lt2>
       <a:accent1>
-        <a:srgbClr val="40BAD2"/>
+        <a:srgbClr val="4472C4"/>
       </a:accent1>
       <a:accent2>
-        <a:srgbClr val="FAB900"/>
+        <a:srgbClr val="ED7D31"/>
       </a:accent2>
       <a:accent3>
-        <a:srgbClr val="90BB23"/>
+        <a:srgbClr val="A5A5A5"/>
       </a:accent3>
       <a:accent4>
-        <a:srgbClr val="EE7008"/>
+        <a:srgbClr val="FFC000"/>
       </a:accent4>
       <a:accent5>
-        <a:srgbClr val="1AB39F"/>
+        <a:srgbClr val="5B9BD5"/>
       </a:accent5>
       <a:accent6>
-        <a:srgbClr val="D5393D"/>
+        <a:srgbClr val="70AD47"/>
       </a:accent6>
       <a:hlink>
-        <a:srgbClr val="90BB23"/>
+        <a:srgbClr val="0563C1"/>
       </a:hlink>
       <a:folHlink>
-        <a:srgbClr val="EE7008"/>
+        <a:srgbClr val="954F72"/>
       </a:folHlink>
     </a:clrScheme>
-    <a:fontScheme name="Frame">
+    <a:fontScheme name="Office 2013 - 2022 Theme">
       <a:majorFont>
-        <a:latin typeface="Corbel" panose="020B0503020204020204"/>
+        <a:latin typeface="Calibri Light" panose="020F0302020204030204"/>
         <a:ea typeface=""/>
         <a:cs typeface=""/>
-        <a:font script="Jpan" typeface="ＭＳ ゴシック"/>
-        <a:font script="Hang" typeface="HY중고딕"/>
-        <a:font script="Hans" typeface="幼圆"/>
-        <a:font script="Hant" typeface="微軟正黑體"/>
-        <a:font script="Arab" typeface="Tahoma"/>
-        <a:font script="Hebr" typeface="Gisha"/>
-        <a:font script="Thai" typeface="DilleniaUPC"/>
+        <a:font script="Jpan" typeface="游ゴシック Light"/>
+        <a:font script="Hang" typeface="맑은 고딕"/>
+        <a:font script="Hans" typeface="等线 Light"/>
+        <a:font script="Hant" typeface="新細明體"/>
+        <a:font script="Arab" typeface="Times New Roman"/>
+        <a:font script="Hebr" typeface="Times New Roman"/>
+        <a:font script="Thai" typeface="Angsana New"/>
+        <a:font script="Ethi" typeface="Nyala"/>
+        <a:font script="Beng" typeface="Vrinda"/>
+        <a:font script="Gujr" typeface="Shruti"/>
+        <a:font script="Khmr" typeface="MoolBoran"/>
+        <a:font script="Knda" typeface="Tunga"/>
+        <a:font script="Guru" typeface="Raavi"/>
+        <a:font script="Cans" typeface="Euphemia"/>
+        <a:font script="Cher" typeface="Plantagenet Cherokee"/>
+        <a:font script="Yiii" typeface="Microsoft Yi Baiti"/>
+        <a:font script="Tibt" typeface="Microsoft Himalaya"/>
+        <a:font script="Thaa" typeface="MV Boli"/>
+        <a:font script="Deva" typeface="Mangal"/>
+        <a:font script="Telu" typeface="Gautami"/>
+        <a:font script="Taml" typeface="Latha"/>
+        <a:font script="Syrc" typeface="Estrangelo Edessa"/>
+        <a:font script="Orya" typeface="Kalinga"/>
+        <a:font script="Mlym" typeface="Kartika"/>
+        <a:font script="Laoo" typeface="DokChampa"/>
+        <a:font script="Sinh" typeface="Iskoola Pota"/>
+        <a:font script="Mong" typeface="Mongolian Baiti"/>
+        <a:font script="Viet" typeface="Times New Roman"/>
+        <a:font script="Uigh" typeface="Microsoft Uighur"/>
+        <a:font script="Geor" typeface="Sylfaen"/>
+      </a:majorFont>
+      <a:minorFont>
+        <a:latin typeface="Calibri" panose="020F0502020204030204"/>
+        <a:ea typeface=""/>
+        <a:cs typeface=""/>
+        <a:font script="Jpan" typeface="游ゴシック"/>
+        <a:font script="Hang" typeface="맑은 고딕"/>
+        <a:font script="Hans" typeface="等线"/>
+        <a:font script="Hant" typeface="新細明體"/>
+        <a:font script="Arab" typeface="Arial"/>
+        <a:font script="Hebr" typeface="Arial"/>
+        <a:font script="Thai" typeface="Cordia New"/>
         <a:font script="Ethi" typeface="Nyala"/>
         <a:font script="Beng" typeface="Vrinda"/>
         <a:font script="Gujr" typeface="Shruti"/>
@@ -7256,85 +6820,90 @@
         <a:font script="Laoo" typeface="DokChampa"/>
         <a:font script="Sinh" typeface="Iskoola Pota"/>
         <a:font script="Mong" typeface="Mongolian Baiti"/>
-        <a:font script="Viet" typeface="Tahoma"/>
-        <a:font script="Uigh" typeface="Microsoft Uighur"/>
-        <a:font script="Geor" typeface="Sylfaen"/>
-      </a:majorFont>
-      <a:minorFont>
-        <a:latin typeface="Corbel" panose="020B0503020204020204"/>
-        <a:ea typeface=""/>
-        <a:cs typeface=""/>
-        <a:font script="Jpan" typeface="ＭＳ ゴシック"/>
-        <a:font script="Hang" typeface="HY중고딕"/>
-        <a:font script="Hans" typeface="幼圆"/>
-        <a:font script="Hant" typeface="微軟正黑體"/>
-        <a:font script="Arab" typeface="Tahoma"/>
-        <a:font script="Hebr" typeface="Gisha"/>
-        <a:font script="Thai" typeface="DilleniaUPC"/>
-        <a:font script="Ethi" typeface="Nyala"/>
-        <a:font script="Beng" typeface="Vrinda"/>
-        <a:font script="Gujr" typeface="Shruti"/>
-        <a:font script="Khmr" typeface="DaunPenh"/>
-        <a:font script="Knda" typeface="Tunga"/>
-        <a:font script="Guru" typeface="Raavi"/>
-        <a:font script="Cans" typeface="Euphemia"/>
-        <a:font script="Cher" typeface="Plantagenet Cherokee"/>
-        <a:font script="Yiii" typeface="Microsoft Yi Baiti"/>
-        <a:font script="Tibt" typeface="Microsoft Himalaya"/>
-        <a:font script="Thaa" typeface="MV Boli"/>
-        <a:font script="Deva" typeface="Mangal"/>
-        <a:font script="Telu" typeface="Gautami"/>
-        <a:font script="Taml" typeface="Latha"/>
-        <a:font script="Syrc" typeface="Estrangelo Edessa"/>
-        <a:font script="Orya" typeface="Kalinga"/>
-        <a:font script="Mlym" typeface="Kartika"/>
-        <a:font script="Laoo" typeface="DokChampa"/>
-        <a:font script="Sinh" typeface="Iskoola Pota"/>
-        <a:font script="Mong" typeface="Mongolian Baiti"/>
-        <a:font script="Viet" typeface="Verdana"/>
+        <a:font script="Viet" typeface="Arial"/>
         <a:font script="Uigh" typeface="Microsoft Uighur"/>
         <a:font script="Geor" typeface="Sylfaen"/>
       </a:minorFont>
     </a:fontScheme>
-    <a:fmtScheme name="Frame">
+    <a:fmtScheme name="Office 2013 - 2022 Theme">
       <a:fillStyleLst>
         <a:solidFill>
           <a:schemeClr val="phClr"/>
         </a:solidFill>
-        <a:solidFill>
-          <a:schemeClr val="phClr">
-            <a:tint val="65000"/>
-          </a:schemeClr>
-        </a:solidFill>
-        <a:solidFill>
-          <a:schemeClr val="phClr">
-            <a:shade val="80000"/>
-            <a:satMod val="150000"/>
-          </a:schemeClr>
-        </a:solidFill>
+        <a:gradFill rotWithShape="1">
+          <a:gsLst>
+            <a:gs pos="0">
+              <a:schemeClr val="phClr">
+                <a:lumMod val="110000"/>
+                <a:satMod val="105000"/>
+                <a:tint val="67000"/>
+              </a:schemeClr>
+            </a:gs>
+            <a:gs pos="50000">
+              <a:schemeClr val="phClr">
+                <a:lumMod val="105000"/>
+                <a:satMod val="103000"/>
+                <a:tint val="73000"/>
+              </a:schemeClr>
+            </a:gs>
+            <a:gs pos="100000">
+              <a:schemeClr val="phClr">
+                <a:lumMod val="105000"/>
+                <a:satMod val="109000"/>
+                <a:tint val="81000"/>
+              </a:schemeClr>
+            </a:gs>
+          </a:gsLst>
+          <a:lin ang="5400000" scaled="0"/>
+        </a:gradFill>
+        <a:gradFill rotWithShape="1">
+          <a:gsLst>
+            <a:gs pos="0">
+              <a:schemeClr val="phClr">
+                <a:satMod val="103000"/>
+                <a:lumMod val="102000"/>
+                <a:tint val="94000"/>
+              </a:schemeClr>
+            </a:gs>
+            <a:gs pos="50000">
+              <a:schemeClr val="phClr">
+                <a:satMod val="110000"/>
+                <a:lumMod val="100000"/>
+                <a:shade val="100000"/>
+              </a:schemeClr>
+            </a:gs>
+            <a:gs pos="100000">
+              <a:schemeClr val="phClr">
+                <a:lumMod val="99000"/>
+                <a:satMod val="120000"/>
+                <a:shade val="78000"/>
+              </a:schemeClr>
+            </a:gs>
+          </a:gsLst>
+          <a:lin ang="5400000" scaled="0"/>
+        </a:gradFill>
       </a:fillStyleLst>
       <a:lnStyleLst>
-        <a:ln w="9525" cap="flat" cmpd="sng" algn="ctr">
+        <a:ln w="6350" cap="flat" cmpd="sng" algn="ctr">
           <a:solidFill>
             <a:schemeClr val="phClr"/>
           </a:solidFill>
           <a:prstDash val="solid"/>
+          <a:miter lim="800000"/>
         </a:ln>
-        <a:ln w="10795" cap="flat" cmpd="sng" algn="ctr">
+        <a:ln w="12700" cap="flat" cmpd="sng" algn="ctr">
           <a:solidFill>
             <a:schemeClr val="phClr"/>
           </a:solidFill>
           <a:prstDash val="solid"/>
+          <a:miter lim="800000"/>
         </a:ln>
-        <a:ln w="17145" cap="flat" cmpd="sng" algn="ctr">
+        <a:ln w="19050" cap="flat" cmpd="sng" algn="ctr">
           <a:solidFill>
-            <a:schemeClr val="phClr">
-              <a:shade val="95000"/>
-              <a:alpha val="50000"/>
-              <a:satMod val="150000"/>
-            </a:schemeClr>
+            <a:schemeClr val="phClr"/>
           </a:solidFill>
           <a:prstDash val="solid"/>
+          <a:miter lim="800000"/>
         </a:ln>
       </a:lnStyleLst>
       <a:effectStyleLst>
@@ -7346,21 +6915,12 @@
         </a:effectStyle>
         <a:effectStyle>
           <a:effectLst>
-            <a:outerShdw blurRad="44450" dist="13970" dir="5400000" algn="ctr" rotWithShape="0">
+            <a:outerShdw blurRad="57150" dist="19050" dir="5400000" algn="ctr" rotWithShape="0">
               <a:srgbClr val="000000">
-                <a:alpha val="45000"/>
+                <a:alpha val="63000"/>
               </a:srgbClr>
             </a:outerShdw>
           </a:effectLst>
-          <a:scene3d>
-            <a:camera prst="orthographicFront">
-              <a:rot lat="0" lon="0" rev="0"/>
-            </a:camera>
-            <a:lightRig rig="twoPt" dir="tl"/>
-          </a:scene3d>
-          <a:sp3d prstMaterial="flat">
-            <a:bevelT w="12700" h="25400" prst="coolSlant"/>
-          </a:sp3d>
         </a:effectStyle>
       </a:effectStyleLst>
       <a:bgFillStyleLst>
@@ -7378,24 +6938,23 @@
             <a:gs pos="0">
               <a:schemeClr val="phClr">
                 <a:tint val="93000"/>
+                <a:satMod val="150000"/>
                 <a:shade val="98000"/>
-                <a:satMod val="120000"/>
                 <a:lumMod val="102000"/>
               </a:schemeClr>
             </a:gs>
-            <a:gs pos="48000">
+            <a:gs pos="50000">
               <a:schemeClr val="phClr">
                 <a:tint val="98000"/>
+                <a:satMod val="130000"/>
                 <a:shade val="90000"/>
-                <a:satMod val="110000"/>
                 <a:lumMod val="103000"/>
               </a:schemeClr>
             </a:gs>
             <a:gs pos="100000">
               <a:schemeClr val="phClr">
-                <a:tint val="98000"/>
-                <a:shade val="80000"/>
-                <a:satMod val="100000"/>
+                <a:shade val="63000"/>
+                <a:satMod val="120000"/>
               </a:schemeClr>
             </a:gs>
           </a:gsLst>
@@ -7408,7 +6967,7 @@
   <a:extraClrSchemeLst/>
   <a:extLst>
     <a:ext uri="{05A4C25C-085E-4340-85A3-A5531E510DB2}">
-      <thm15:themeFamily xmlns:thm15="http://schemas.microsoft.com/office/thememl/2012/main" name="Frame" id="{F226E7A2-7162-461C-9490-D27D9DC04E43}" vid="{629A0216-3BBD-45C0-B63F-2683BEA18F60}"/>
+      <thm15:themeFamily xmlns:thm15="http://schemas.microsoft.com/office/thememl/2012/main" name="Office 2013 - 2022 Theme" id="{62F939B6-93AF-4DB8-9C6B-D6C7DFDC589F}" vid="{4A3C46E8-61CC-4603-A589-7422A47A8E4A}"/>
     </a:ext>
   </a:extLst>
 </a:theme>
